--- a/assets/figures-editable/c3-c4/c3-e11.pptx
+++ b/assets/figures-editable/c3-c4/c3-e11.pptx
@@ -3104,8 +3104,8 @@
         </p:nvSpPr>
         <p:spPr>
           <a:xfrm>
-            <a:off x="274320" y="137160"/>
-            <a:ext cx="11612880" cy="365760"/>
+            <a:off x="274320" y="118872"/>
+            <a:ext cx="11612880" cy="340105"/>
           </a:xfrm>
           <a:prstGeom prst="rect">
             <a:avLst/>
@@ -3114,7 +3114,7 @@
           <a:effectLst/>
         </p:spPr>
         <p:txBody>
-          <a:bodyPr wrap="square" lIns="27432" rIns="27432" tIns="18288" bIns="18288" anchor="ctr">
+          <a:bodyPr wrap="none" lIns="18288" rIns="18288" tIns="18288" bIns="18288" anchor="t">
             <a:spAutoFit/>
           </a:bodyPr>
           <a:lstStyle/>
@@ -3125,7 +3125,7 @@
               </a:spcAft>
             </a:pPr>
             <a:r>
-              <a:rPr sz="2100" b="0" i="0">
+              <a:rPr sz="1900" b="1" i="0">
                 <a:solidFill>
                   <a:srgbClr val="8EDBD4"/>
                 </a:solidFill>
@@ -3136,23 +3136,20 @@
           </a:p>
         </p:txBody>
       </p:sp>
-      <p:sp>
-        <p:nvSpPr>
-          <p:cNvPr id="3" name="C3-E11 rect 1" descr="sci-ppt:o001"/>
-          <p:cNvSpPr/>
-          <p:nvPr/>
-        </p:nvSpPr>
-        <p:spPr>
-          <a:xfrm>
-            <a:off x="594360" y="1417320"/>
-            <a:ext cx="3200400" cy="1325880"/>
-          </a:xfrm>
-          <a:prstGeom prst="rect">
-            <a:avLst/>
-          </a:prstGeom>
-          <a:solidFill>
-            <a:srgbClr val="213E4B"/>
-          </a:solidFill>
+      <p:cxnSp>
+        <p:nvCxnSpPr>
+          <p:cNvPr id="3" name="C3-E11 line 1" descr="sci-ppt:o001"/>
+          <p:cNvCxnSpPr/>
+          <p:nvPr/>
+        </p:nvCxnSpPr>
+        <p:spPr>
+          <a:xfrm>
+            <a:off x="914400" y="4937760"/>
+            <a:ext cx="5120640" cy="0"/>
+          </a:xfrm>
+          <a:prstGeom prst="line">
+            <a:avLst/>
+          </a:prstGeom>
           <a:ln w="19050">
             <a:solidFill>
               <a:srgbClr val="B4C7D2"/>
@@ -3160,24 +3157,83 @@
           </a:ln>
           <a:effectLst/>
         </p:spPr>
-        <p:txBody>
-          <a:bodyPr rtlCol="0" anchor="ctr"/>
-          <a:lstStyle/>
-          <a:p>
-            <a:pPr algn="ctr"/>
-          </a:p>
-        </p:txBody>
-      </p:sp>
-      <p:sp>
-        <p:nvSpPr>
-          <p:cNvPr id="4" name="C3-E11 text 2" descr="sci-ppt:o002"/>
+      </p:cxnSp>
+      <p:cxnSp>
+        <p:nvCxnSpPr>
+          <p:cNvPr id="4" name="C3-E11 line 2" descr="sci-ppt:o002"/>
+          <p:cNvCxnSpPr/>
+          <p:nvPr/>
+        </p:nvCxnSpPr>
+        <p:spPr>
+          <a:xfrm>
+            <a:off x="914400" y="1371600"/>
+            <a:ext cx="0" cy="3566160"/>
+          </a:xfrm>
+          <a:prstGeom prst="line">
+            <a:avLst/>
+          </a:prstGeom>
+          <a:ln w="19050">
+            <a:solidFill>
+              <a:srgbClr val="B4C7D2"/>
+            </a:solidFill>
+          </a:ln>
+          <a:effectLst/>
+        </p:spPr>
+      </p:cxnSp>
+      <p:cxnSp>
+        <p:nvCxnSpPr>
+          <p:cNvPr id="5" name="C3-E11 line 3" descr="sci-ppt:o003"/>
+          <p:cNvCxnSpPr/>
+          <p:nvPr/>
+        </p:nvCxnSpPr>
+        <p:spPr>
+          <a:xfrm>
+            <a:off x="914400" y="4937760"/>
+            <a:ext cx="0" cy="64008"/>
+          </a:xfrm>
+          <a:prstGeom prst="line">
+            <a:avLst/>
+          </a:prstGeom>
+          <a:ln w="12700">
+            <a:solidFill>
+              <a:srgbClr val="B4C7D2"/>
+            </a:solidFill>
+          </a:ln>
+          <a:effectLst/>
+        </p:spPr>
+      </p:cxnSp>
+      <p:cxnSp>
+        <p:nvCxnSpPr>
+          <p:cNvPr id="6" name="C3-E11 line 4" descr="sci-ppt:o004"/>
+          <p:cNvCxnSpPr/>
+          <p:nvPr/>
+        </p:nvCxnSpPr>
+        <p:spPr>
+          <a:xfrm>
+            <a:off x="914400" y="1371600"/>
+            <a:ext cx="0" cy="3566160"/>
+          </a:xfrm>
+          <a:prstGeom prst="line">
+            <a:avLst/>
+          </a:prstGeom>
+          <a:ln w="7620">
+            <a:solidFill>
+              <a:srgbClr val="2E4756"/>
+            </a:solidFill>
+          </a:ln>
+          <a:effectLst/>
+        </p:spPr>
+      </p:cxnSp>
+      <p:sp>
+        <p:nvSpPr>
+          <p:cNvPr id="7" name="C3-E11 text 5" descr="sci-ppt:o005"/>
           <p:cNvSpPr txBox="1"/>
           <p:nvPr/>
         </p:nvSpPr>
         <p:spPr>
           <a:xfrm>
-            <a:off x="758952" y="1627632"/>
-            <a:ext cx="2871216" cy="914400"/>
+            <a:off x="457200" y="5020056"/>
+            <a:ext cx="914400" cy="208407"/>
           </a:xfrm>
           <a:prstGeom prst="rect">
             <a:avLst/>
@@ -3186,7 +3242,865 @@
           <a:effectLst/>
         </p:spPr>
         <p:txBody>
-          <a:bodyPr wrap="square" lIns="27432" rIns="27432" tIns="18288" bIns="18288" anchor="ctr">
+          <a:bodyPr wrap="none" lIns="18288" rIns="18288" tIns="18288" bIns="18288" anchor="t">
+            <a:spAutoFit/>
+          </a:bodyPr>
+          <a:lstStyle/>
+          <a:p>
+            <a:pPr algn="ctr">
+              <a:spcAft>
+                <a:spcPts val="0"/>
+              </a:spcAft>
+            </a:pPr>
+            <a:r>
+              <a:rPr sz="1050" b="0" i="0">
+                <a:solidFill>
+                  <a:srgbClr val="B4C7D2"/>
+                </a:solidFill>
+                <a:latin typeface="Arial"/>
+              </a:rPr>
+              <a:t>1</a:t>
+            </a:r>
+          </a:p>
+        </p:txBody>
+      </p:sp>
+      <p:cxnSp>
+        <p:nvCxnSpPr>
+          <p:cNvPr id="8" name="C3-E11 line 6" descr="sci-ppt:o006"/>
+          <p:cNvCxnSpPr/>
+          <p:nvPr/>
+        </p:nvCxnSpPr>
+        <p:spPr>
+          <a:xfrm>
+            <a:off x="1767839" y="4937760"/>
+            <a:ext cx="0" cy="64008"/>
+          </a:xfrm>
+          <a:prstGeom prst="line">
+            <a:avLst/>
+          </a:prstGeom>
+          <a:ln w="12700">
+            <a:solidFill>
+              <a:srgbClr val="B4C7D2"/>
+            </a:solidFill>
+          </a:ln>
+          <a:effectLst/>
+        </p:spPr>
+      </p:cxnSp>
+      <p:cxnSp>
+        <p:nvCxnSpPr>
+          <p:cNvPr id="9" name="C3-E11 line 7" descr="sci-ppt:o007"/>
+          <p:cNvCxnSpPr/>
+          <p:nvPr/>
+        </p:nvCxnSpPr>
+        <p:spPr>
+          <a:xfrm>
+            <a:off x="1767839" y="1371600"/>
+            <a:ext cx="0" cy="3566160"/>
+          </a:xfrm>
+          <a:prstGeom prst="line">
+            <a:avLst/>
+          </a:prstGeom>
+          <a:ln w="7620">
+            <a:solidFill>
+              <a:srgbClr val="2E4756"/>
+            </a:solidFill>
+          </a:ln>
+          <a:effectLst/>
+        </p:spPr>
+      </p:cxnSp>
+      <p:sp>
+        <p:nvSpPr>
+          <p:cNvPr id="10" name="C3-E11 text 8" descr="sci-ppt:o008"/>
+          <p:cNvSpPr txBox="1"/>
+          <p:nvPr/>
+        </p:nvSpPr>
+        <p:spPr>
+          <a:xfrm>
+            <a:off x="1310639" y="5020056"/>
+            <a:ext cx="914400" cy="208407"/>
+          </a:xfrm>
+          <a:prstGeom prst="rect">
+            <a:avLst/>
+          </a:prstGeom>
+          <a:noFill/>
+          <a:effectLst/>
+        </p:spPr>
+        <p:txBody>
+          <a:bodyPr wrap="none" lIns="18288" rIns="18288" tIns="18288" bIns="18288" anchor="t">
+            <a:spAutoFit/>
+          </a:bodyPr>
+          <a:lstStyle/>
+          <a:p>
+            <a:pPr algn="ctr">
+              <a:spcAft>
+                <a:spcPts val="0"/>
+              </a:spcAft>
+            </a:pPr>
+            <a:r>
+              <a:rPr sz="1050" b="0" i="0">
+                <a:solidFill>
+                  <a:srgbClr val="B4C7D2"/>
+                </a:solidFill>
+                <a:latin typeface="Arial"/>
+              </a:rPr>
+              <a:t>5</a:t>
+            </a:r>
+          </a:p>
+        </p:txBody>
+      </p:sp>
+      <p:cxnSp>
+        <p:nvCxnSpPr>
+          <p:cNvPr id="11" name="C3-E11 line 9" descr="sci-ppt:o009"/>
+          <p:cNvCxnSpPr/>
+          <p:nvPr/>
+        </p:nvCxnSpPr>
+        <p:spPr>
+          <a:xfrm>
+            <a:off x="2834639" y="4937760"/>
+            <a:ext cx="0" cy="64008"/>
+          </a:xfrm>
+          <a:prstGeom prst="line">
+            <a:avLst/>
+          </a:prstGeom>
+          <a:ln w="12700">
+            <a:solidFill>
+              <a:srgbClr val="B4C7D2"/>
+            </a:solidFill>
+          </a:ln>
+          <a:effectLst/>
+        </p:spPr>
+      </p:cxnSp>
+      <p:cxnSp>
+        <p:nvCxnSpPr>
+          <p:cNvPr id="12" name="C3-E11 line 10" descr="sci-ppt:o010"/>
+          <p:cNvCxnSpPr/>
+          <p:nvPr/>
+        </p:nvCxnSpPr>
+        <p:spPr>
+          <a:xfrm>
+            <a:off x="2834639" y="1371600"/>
+            <a:ext cx="0" cy="3566160"/>
+          </a:xfrm>
+          <a:prstGeom prst="line">
+            <a:avLst/>
+          </a:prstGeom>
+          <a:ln w="7620">
+            <a:solidFill>
+              <a:srgbClr val="2E4756"/>
+            </a:solidFill>
+          </a:ln>
+          <a:effectLst/>
+        </p:spPr>
+      </p:cxnSp>
+      <p:sp>
+        <p:nvSpPr>
+          <p:cNvPr id="13" name="C3-E11 text 11" descr="sci-ppt:o011"/>
+          <p:cNvSpPr txBox="1"/>
+          <p:nvPr/>
+        </p:nvSpPr>
+        <p:spPr>
+          <a:xfrm>
+            <a:off x="2377439" y="5020056"/>
+            <a:ext cx="914400" cy="208407"/>
+          </a:xfrm>
+          <a:prstGeom prst="rect">
+            <a:avLst/>
+          </a:prstGeom>
+          <a:noFill/>
+          <a:effectLst/>
+        </p:spPr>
+        <p:txBody>
+          <a:bodyPr wrap="none" lIns="18288" rIns="18288" tIns="18288" bIns="18288" anchor="t">
+            <a:spAutoFit/>
+          </a:bodyPr>
+          <a:lstStyle/>
+          <a:p>
+            <a:pPr algn="ctr">
+              <a:spcAft>
+                <a:spcPts val="0"/>
+              </a:spcAft>
+            </a:pPr>
+            <a:r>
+              <a:rPr sz="1050" b="0" i="0">
+                <a:solidFill>
+                  <a:srgbClr val="B4C7D2"/>
+                </a:solidFill>
+                <a:latin typeface="Arial"/>
+              </a:rPr>
+              <a:t>10</a:t>
+            </a:r>
+          </a:p>
+        </p:txBody>
+      </p:sp>
+      <p:cxnSp>
+        <p:nvCxnSpPr>
+          <p:cNvPr id="14" name="C3-E11 line 12" descr="sci-ppt:o012"/>
+          <p:cNvCxnSpPr/>
+          <p:nvPr/>
+        </p:nvCxnSpPr>
+        <p:spPr>
+          <a:xfrm>
+            <a:off x="3901440" y="4937760"/>
+            <a:ext cx="0" cy="64008"/>
+          </a:xfrm>
+          <a:prstGeom prst="line">
+            <a:avLst/>
+          </a:prstGeom>
+          <a:ln w="12700">
+            <a:solidFill>
+              <a:srgbClr val="B4C7D2"/>
+            </a:solidFill>
+          </a:ln>
+          <a:effectLst/>
+        </p:spPr>
+      </p:cxnSp>
+      <p:cxnSp>
+        <p:nvCxnSpPr>
+          <p:cNvPr id="15" name="C3-E11 line 13" descr="sci-ppt:o013"/>
+          <p:cNvCxnSpPr/>
+          <p:nvPr/>
+        </p:nvCxnSpPr>
+        <p:spPr>
+          <a:xfrm>
+            <a:off x="3901440" y="1371600"/>
+            <a:ext cx="0" cy="3566160"/>
+          </a:xfrm>
+          <a:prstGeom prst="line">
+            <a:avLst/>
+          </a:prstGeom>
+          <a:ln w="7620">
+            <a:solidFill>
+              <a:srgbClr val="2E4756"/>
+            </a:solidFill>
+          </a:ln>
+          <a:effectLst/>
+        </p:spPr>
+      </p:cxnSp>
+      <p:sp>
+        <p:nvSpPr>
+          <p:cNvPr id="16" name="C3-E11 text 14" descr="sci-ppt:o014"/>
+          <p:cNvSpPr txBox="1"/>
+          <p:nvPr/>
+        </p:nvSpPr>
+        <p:spPr>
+          <a:xfrm>
+            <a:off x="3444240" y="5020056"/>
+            <a:ext cx="914400" cy="208407"/>
+          </a:xfrm>
+          <a:prstGeom prst="rect">
+            <a:avLst/>
+          </a:prstGeom>
+          <a:noFill/>
+          <a:effectLst/>
+        </p:spPr>
+        <p:txBody>
+          <a:bodyPr wrap="none" lIns="18288" rIns="18288" tIns="18288" bIns="18288" anchor="t">
+            <a:spAutoFit/>
+          </a:bodyPr>
+          <a:lstStyle/>
+          <a:p>
+            <a:pPr algn="ctr">
+              <a:spcAft>
+                <a:spcPts val="0"/>
+              </a:spcAft>
+            </a:pPr>
+            <a:r>
+              <a:rPr sz="1050" b="0" i="0">
+                <a:solidFill>
+                  <a:srgbClr val="B4C7D2"/>
+                </a:solidFill>
+                <a:latin typeface="Arial"/>
+              </a:rPr>
+              <a:t>15</a:t>
+            </a:r>
+          </a:p>
+        </p:txBody>
+      </p:sp>
+      <p:cxnSp>
+        <p:nvCxnSpPr>
+          <p:cNvPr id="17" name="C3-E11 line 15" descr="sci-ppt:o015"/>
+          <p:cNvCxnSpPr/>
+          <p:nvPr/>
+        </p:nvCxnSpPr>
+        <p:spPr>
+          <a:xfrm>
+            <a:off x="4968239" y="4937760"/>
+            <a:ext cx="0" cy="64008"/>
+          </a:xfrm>
+          <a:prstGeom prst="line">
+            <a:avLst/>
+          </a:prstGeom>
+          <a:ln w="12700">
+            <a:solidFill>
+              <a:srgbClr val="B4C7D2"/>
+            </a:solidFill>
+          </a:ln>
+          <a:effectLst/>
+        </p:spPr>
+      </p:cxnSp>
+      <p:cxnSp>
+        <p:nvCxnSpPr>
+          <p:cNvPr id="18" name="C3-E11 line 16" descr="sci-ppt:o016"/>
+          <p:cNvCxnSpPr/>
+          <p:nvPr/>
+        </p:nvCxnSpPr>
+        <p:spPr>
+          <a:xfrm>
+            <a:off x="4968239" y="1371600"/>
+            <a:ext cx="0" cy="3566160"/>
+          </a:xfrm>
+          <a:prstGeom prst="line">
+            <a:avLst/>
+          </a:prstGeom>
+          <a:ln w="7620">
+            <a:solidFill>
+              <a:srgbClr val="2E4756"/>
+            </a:solidFill>
+          </a:ln>
+          <a:effectLst/>
+        </p:spPr>
+      </p:cxnSp>
+      <p:sp>
+        <p:nvSpPr>
+          <p:cNvPr id="19" name="C3-E11 text 17" descr="sci-ppt:o017"/>
+          <p:cNvSpPr txBox="1"/>
+          <p:nvPr/>
+        </p:nvSpPr>
+        <p:spPr>
+          <a:xfrm>
+            <a:off x="4511039" y="5020056"/>
+            <a:ext cx="914400" cy="208407"/>
+          </a:xfrm>
+          <a:prstGeom prst="rect">
+            <a:avLst/>
+          </a:prstGeom>
+          <a:noFill/>
+          <a:effectLst/>
+        </p:spPr>
+        <p:txBody>
+          <a:bodyPr wrap="none" lIns="18288" rIns="18288" tIns="18288" bIns="18288" anchor="t">
+            <a:spAutoFit/>
+          </a:bodyPr>
+          <a:lstStyle/>
+          <a:p>
+            <a:pPr algn="ctr">
+              <a:spcAft>
+                <a:spcPts val="0"/>
+              </a:spcAft>
+            </a:pPr>
+            <a:r>
+              <a:rPr sz="1050" b="0" i="0">
+                <a:solidFill>
+                  <a:srgbClr val="B4C7D2"/>
+                </a:solidFill>
+                <a:latin typeface="Arial"/>
+              </a:rPr>
+              <a:t>20</a:t>
+            </a:r>
+          </a:p>
+        </p:txBody>
+      </p:sp>
+      <p:cxnSp>
+        <p:nvCxnSpPr>
+          <p:cNvPr id="20" name="C3-E11 line 18" descr="sci-ppt:o018"/>
+          <p:cNvCxnSpPr/>
+          <p:nvPr/>
+        </p:nvCxnSpPr>
+        <p:spPr>
+          <a:xfrm>
+            <a:off x="6035040" y="4937760"/>
+            <a:ext cx="0" cy="64008"/>
+          </a:xfrm>
+          <a:prstGeom prst="line">
+            <a:avLst/>
+          </a:prstGeom>
+          <a:ln w="12700">
+            <a:solidFill>
+              <a:srgbClr val="B4C7D2"/>
+            </a:solidFill>
+          </a:ln>
+          <a:effectLst/>
+        </p:spPr>
+      </p:cxnSp>
+      <p:cxnSp>
+        <p:nvCxnSpPr>
+          <p:cNvPr id="21" name="C3-E11 line 19" descr="sci-ppt:o019"/>
+          <p:cNvCxnSpPr/>
+          <p:nvPr/>
+        </p:nvCxnSpPr>
+        <p:spPr>
+          <a:xfrm>
+            <a:off x="6035040" y="1371600"/>
+            <a:ext cx="0" cy="3566160"/>
+          </a:xfrm>
+          <a:prstGeom prst="line">
+            <a:avLst/>
+          </a:prstGeom>
+          <a:ln w="7620">
+            <a:solidFill>
+              <a:srgbClr val="2E4756"/>
+            </a:solidFill>
+          </a:ln>
+          <a:effectLst/>
+        </p:spPr>
+      </p:cxnSp>
+      <p:sp>
+        <p:nvSpPr>
+          <p:cNvPr id="22" name="C3-E11 text 20" descr="sci-ppt:o020"/>
+          <p:cNvSpPr txBox="1"/>
+          <p:nvPr/>
+        </p:nvSpPr>
+        <p:spPr>
+          <a:xfrm>
+            <a:off x="5577840" y="5020056"/>
+            <a:ext cx="914400" cy="208407"/>
+          </a:xfrm>
+          <a:prstGeom prst="rect">
+            <a:avLst/>
+          </a:prstGeom>
+          <a:noFill/>
+          <a:effectLst/>
+        </p:spPr>
+        <p:txBody>
+          <a:bodyPr wrap="none" lIns="18288" rIns="18288" tIns="18288" bIns="18288" anchor="t">
+            <a:spAutoFit/>
+          </a:bodyPr>
+          <a:lstStyle/>
+          <a:p>
+            <a:pPr algn="ctr">
+              <a:spcAft>
+                <a:spcPts val="0"/>
+              </a:spcAft>
+            </a:pPr>
+            <a:r>
+              <a:rPr sz="1050" b="0" i="0">
+                <a:solidFill>
+                  <a:srgbClr val="B4C7D2"/>
+                </a:solidFill>
+                <a:latin typeface="Arial"/>
+              </a:rPr>
+              <a:t>25</a:t>
+            </a:r>
+          </a:p>
+        </p:txBody>
+      </p:sp>
+      <p:cxnSp>
+        <p:nvCxnSpPr>
+          <p:cNvPr id="23" name="C3-E11 line 21" descr="sci-ppt:o021"/>
+          <p:cNvCxnSpPr/>
+          <p:nvPr/>
+        </p:nvCxnSpPr>
+        <p:spPr>
+          <a:xfrm>
+            <a:off x="850392" y="4937760"/>
+            <a:ext cx="64008" cy="0"/>
+          </a:xfrm>
+          <a:prstGeom prst="line">
+            <a:avLst/>
+          </a:prstGeom>
+          <a:ln w="12700">
+            <a:solidFill>
+              <a:srgbClr val="B4C7D2"/>
+            </a:solidFill>
+          </a:ln>
+          <a:effectLst/>
+        </p:spPr>
+      </p:cxnSp>
+      <p:cxnSp>
+        <p:nvCxnSpPr>
+          <p:cNvPr id="24" name="C3-E11 line 22" descr="sci-ppt:o022"/>
+          <p:cNvCxnSpPr/>
+          <p:nvPr/>
+        </p:nvCxnSpPr>
+        <p:spPr>
+          <a:xfrm>
+            <a:off x="850392" y="4127269"/>
+            <a:ext cx="64008" cy="0"/>
+          </a:xfrm>
+          <a:prstGeom prst="line">
+            <a:avLst/>
+          </a:prstGeom>
+          <a:ln w="12700">
+            <a:solidFill>
+              <a:srgbClr val="B4C7D2"/>
+            </a:solidFill>
+          </a:ln>
+          <a:effectLst/>
+        </p:spPr>
+      </p:cxnSp>
+      <p:cxnSp>
+        <p:nvCxnSpPr>
+          <p:cNvPr id="25" name="C3-E11 line 23" descr="sci-ppt:o023"/>
+          <p:cNvCxnSpPr/>
+          <p:nvPr/>
+        </p:nvCxnSpPr>
+        <p:spPr>
+          <a:xfrm>
+            <a:off x="914400" y="4127269"/>
+            <a:ext cx="5120640" cy="0"/>
+          </a:xfrm>
+          <a:prstGeom prst="line">
+            <a:avLst/>
+          </a:prstGeom>
+          <a:ln w="7620">
+            <a:solidFill>
+              <a:srgbClr val="2E4756"/>
+            </a:solidFill>
+          </a:ln>
+          <a:effectLst/>
+        </p:spPr>
+      </p:cxnSp>
+      <p:sp>
+        <p:nvSpPr>
+          <p:cNvPr id="26" name="C3-E11 text 24" descr="sci-ppt:o024"/>
+          <p:cNvSpPr txBox="1"/>
+          <p:nvPr/>
+        </p:nvSpPr>
+        <p:spPr>
+          <a:xfrm>
+            <a:off x="45720" y="4044973"/>
+            <a:ext cx="777240" cy="208407"/>
+          </a:xfrm>
+          <a:prstGeom prst="rect">
+            <a:avLst/>
+          </a:prstGeom>
+          <a:noFill/>
+          <a:effectLst/>
+        </p:spPr>
+        <p:txBody>
+          <a:bodyPr wrap="none" lIns="18288" rIns="18288" tIns="18288" bIns="18288" anchor="t">
+            <a:spAutoFit/>
+          </a:bodyPr>
+          <a:lstStyle/>
+          <a:p>
+            <a:pPr algn="r">
+              <a:spcAft>
+                <a:spcPts val="0"/>
+              </a:spcAft>
+            </a:pPr>
+            <a:r>
+              <a:rPr sz="1050" b="0" i="0">
+                <a:solidFill>
+                  <a:srgbClr val="B4C7D2"/>
+                </a:solidFill>
+                <a:latin typeface="Arial"/>
+              </a:rPr>
+              <a:t>0.25</a:t>
+            </a:r>
+          </a:p>
+        </p:txBody>
+      </p:sp>
+      <p:cxnSp>
+        <p:nvCxnSpPr>
+          <p:cNvPr id="27" name="C3-E11 line 25" descr="sci-ppt:o025"/>
+          <p:cNvCxnSpPr/>
+          <p:nvPr/>
+        </p:nvCxnSpPr>
+        <p:spPr>
+          <a:xfrm>
+            <a:off x="850392" y="3316778"/>
+            <a:ext cx="64008" cy="0"/>
+          </a:xfrm>
+          <a:prstGeom prst="line">
+            <a:avLst/>
+          </a:prstGeom>
+          <a:ln w="12700">
+            <a:solidFill>
+              <a:srgbClr val="B4C7D2"/>
+            </a:solidFill>
+          </a:ln>
+          <a:effectLst/>
+        </p:spPr>
+      </p:cxnSp>
+      <p:cxnSp>
+        <p:nvCxnSpPr>
+          <p:cNvPr id="28" name="C3-E11 line 26" descr="sci-ppt:o026"/>
+          <p:cNvCxnSpPr/>
+          <p:nvPr/>
+        </p:nvCxnSpPr>
+        <p:spPr>
+          <a:xfrm>
+            <a:off x="914400" y="3316778"/>
+            <a:ext cx="5120640" cy="0"/>
+          </a:xfrm>
+          <a:prstGeom prst="line">
+            <a:avLst/>
+          </a:prstGeom>
+          <a:ln w="7620">
+            <a:solidFill>
+              <a:srgbClr val="2E4756"/>
+            </a:solidFill>
+          </a:ln>
+          <a:effectLst/>
+        </p:spPr>
+      </p:cxnSp>
+      <p:sp>
+        <p:nvSpPr>
+          <p:cNvPr id="29" name="C3-E11 text 27" descr="sci-ppt:o027"/>
+          <p:cNvSpPr txBox="1"/>
+          <p:nvPr/>
+        </p:nvSpPr>
+        <p:spPr>
+          <a:xfrm>
+            <a:off x="45720" y="3234482"/>
+            <a:ext cx="777240" cy="208407"/>
+          </a:xfrm>
+          <a:prstGeom prst="rect">
+            <a:avLst/>
+          </a:prstGeom>
+          <a:noFill/>
+          <a:effectLst/>
+        </p:spPr>
+        <p:txBody>
+          <a:bodyPr wrap="none" lIns="18288" rIns="18288" tIns="18288" bIns="18288" anchor="t">
+            <a:spAutoFit/>
+          </a:bodyPr>
+          <a:lstStyle/>
+          <a:p>
+            <a:pPr algn="r">
+              <a:spcAft>
+                <a:spcPts val="0"/>
+              </a:spcAft>
+            </a:pPr>
+            <a:r>
+              <a:rPr sz="1050" b="0" i="0">
+                <a:solidFill>
+                  <a:srgbClr val="B4C7D2"/>
+                </a:solidFill>
+                <a:latin typeface="Arial"/>
+              </a:rPr>
+              <a:t>0.50</a:t>
+            </a:r>
+          </a:p>
+        </p:txBody>
+      </p:sp>
+      <p:cxnSp>
+        <p:nvCxnSpPr>
+          <p:cNvPr id="30" name="C3-E11 line 28" descr="sci-ppt:o028"/>
+          <p:cNvCxnSpPr/>
+          <p:nvPr/>
+        </p:nvCxnSpPr>
+        <p:spPr>
+          <a:xfrm>
+            <a:off x="850392" y="2506287"/>
+            <a:ext cx="64008" cy="0"/>
+          </a:xfrm>
+          <a:prstGeom prst="line">
+            <a:avLst/>
+          </a:prstGeom>
+          <a:ln w="12700">
+            <a:solidFill>
+              <a:srgbClr val="B4C7D2"/>
+            </a:solidFill>
+          </a:ln>
+          <a:effectLst/>
+        </p:spPr>
+      </p:cxnSp>
+      <p:cxnSp>
+        <p:nvCxnSpPr>
+          <p:cNvPr id="31" name="C3-E11 line 29" descr="sci-ppt:o029"/>
+          <p:cNvCxnSpPr/>
+          <p:nvPr/>
+        </p:nvCxnSpPr>
+        <p:spPr>
+          <a:xfrm>
+            <a:off x="914400" y="2506287"/>
+            <a:ext cx="5120640" cy="0"/>
+          </a:xfrm>
+          <a:prstGeom prst="line">
+            <a:avLst/>
+          </a:prstGeom>
+          <a:ln w="7620">
+            <a:solidFill>
+              <a:srgbClr val="2E4756"/>
+            </a:solidFill>
+          </a:ln>
+          <a:effectLst/>
+        </p:spPr>
+      </p:cxnSp>
+      <p:sp>
+        <p:nvSpPr>
+          <p:cNvPr id="32" name="C3-E11 text 30" descr="sci-ppt:o030"/>
+          <p:cNvSpPr txBox="1"/>
+          <p:nvPr/>
+        </p:nvSpPr>
+        <p:spPr>
+          <a:xfrm>
+            <a:off x="45720" y="2423991"/>
+            <a:ext cx="777240" cy="208407"/>
+          </a:xfrm>
+          <a:prstGeom prst="rect">
+            <a:avLst/>
+          </a:prstGeom>
+          <a:noFill/>
+          <a:effectLst/>
+        </p:spPr>
+        <p:txBody>
+          <a:bodyPr wrap="none" lIns="18288" rIns="18288" tIns="18288" bIns="18288" anchor="t">
+            <a:spAutoFit/>
+          </a:bodyPr>
+          <a:lstStyle/>
+          <a:p>
+            <a:pPr algn="r">
+              <a:spcAft>
+                <a:spcPts val="0"/>
+              </a:spcAft>
+            </a:pPr>
+            <a:r>
+              <a:rPr sz="1050" b="0" i="0">
+                <a:solidFill>
+                  <a:srgbClr val="B4C7D2"/>
+                </a:solidFill>
+                <a:latin typeface="Arial"/>
+              </a:rPr>
+              <a:t>0.75</a:t>
+            </a:r>
+          </a:p>
+        </p:txBody>
+      </p:sp>
+      <p:cxnSp>
+        <p:nvCxnSpPr>
+          <p:cNvPr id="33" name="C3-E11 line 31" descr="sci-ppt:o031"/>
+          <p:cNvCxnSpPr/>
+          <p:nvPr/>
+        </p:nvCxnSpPr>
+        <p:spPr>
+          <a:xfrm>
+            <a:off x="850392" y="1695796"/>
+            <a:ext cx="64008" cy="0"/>
+          </a:xfrm>
+          <a:prstGeom prst="line">
+            <a:avLst/>
+          </a:prstGeom>
+          <a:ln w="12700">
+            <a:solidFill>
+              <a:srgbClr val="B4C7D2"/>
+            </a:solidFill>
+          </a:ln>
+          <a:effectLst/>
+        </p:spPr>
+      </p:cxnSp>
+      <p:cxnSp>
+        <p:nvCxnSpPr>
+          <p:cNvPr id="34" name="C3-E11 line 32" descr="sci-ppt:o032"/>
+          <p:cNvCxnSpPr/>
+          <p:nvPr/>
+        </p:nvCxnSpPr>
+        <p:spPr>
+          <a:xfrm>
+            <a:off x="914400" y="1695796"/>
+            <a:ext cx="5120640" cy="0"/>
+          </a:xfrm>
+          <a:prstGeom prst="line">
+            <a:avLst/>
+          </a:prstGeom>
+          <a:ln w="7620">
+            <a:solidFill>
+              <a:srgbClr val="2E4756"/>
+            </a:solidFill>
+          </a:ln>
+          <a:effectLst/>
+        </p:spPr>
+      </p:cxnSp>
+      <p:sp>
+        <p:nvSpPr>
+          <p:cNvPr id="35" name="C3-E11 text 33" descr="sci-ppt:o033"/>
+          <p:cNvSpPr txBox="1"/>
+          <p:nvPr/>
+        </p:nvSpPr>
+        <p:spPr>
+          <a:xfrm>
+            <a:off x="45720" y="1613500"/>
+            <a:ext cx="777240" cy="208407"/>
+          </a:xfrm>
+          <a:prstGeom prst="rect">
+            <a:avLst/>
+          </a:prstGeom>
+          <a:noFill/>
+          <a:effectLst/>
+        </p:spPr>
+        <p:txBody>
+          <a:bodyPr wrap="none" lIns="18288" rIns="18288" tIns="18288" bIns="18288" anchor="t">
+            <a:spAutoFit/>
+          </a:bodyPr>
+          <a:lstStyle/>
+          <a:p>
+            <a:pPr algn="r">
+              <a:spcAft>
+                <a:spcPts val="0"/>
+              </a:spcAft>
+            </a:pPr>
+            <a:r>
+              <a:rPr sz="1050" b="0" i="0">
+                <a:solidFill>
+                  <a:srgbClr val="B4C7D2"/>
+                </a:solidFill>
+                <a:latin typeface="Arial"/>
+              </a:rPr>
+              <a:t>1.00</a:t>
+            </a:r>
+          </a:p>
+        </p:txBody>
+      </p:sp>
+      <p:sp>
+        <p:nvSpPr>
+          <p:cNvPr id="36" name="C3-E11 text 34" descr="sci-ppt:o034"/>
+          <p:cNvSpPr txBox="1"/>
+          <p:nvPr/>
+        </p:nvSpPr>
+        <p:spPr>
+          <a:xfrm>
+            <a:off x="914400" y="5221224"/>
+            <a:ext cx="5120640" cy="231648"/>
+          </a:xfrm>
+          <a:prstGeom prst="rect">
+            <a:avLst/>
+          </a:prstGeom>
+          <a:noFill/>
+          <a:effectLst/>
+        </p:spPr>
+        <p:txBody>
+          <a:bodyPr wrap="none" lIns="18288" rIns="18288" tIns="18288" bIns="18288" anchor="t">
+            <a:spAutoFit/>
+          </a:bodyPr>
+          <a:lstStyle/>
+          <a:p>
+            <a:pPr algn="ctr">
+              <a:spcAft>
+                <a:spcPts val="0"/>
+              </a:spcAft>
+            </a:pPr>
+            <a:r>
+              <a:rPr sz="1200" b="0" i="0">
+                <a:solidFill>
+                  <a:srgbClr val="E7F0F3"/>
+                </a:solidFill>
+                <a:latin typeface="Arial"/>
+              </a:rPr>
+              <a:t>number of bubbles N</a:t>
+            </a:r>
+          </a:p>
+        </p:txBody>
+      </p:sp>
+      <p:sp>
+        <p:nvSpPr>
+          <p:cNvPr id="37" name="C3-E11 text 35" descr="sci-ppt:o035"/>
+          <p:cNvSpPr txBox="1"/>
+          <p:nvPr/>
+        </p:nvSpPr>
+        <p:spPr>
+          <a:xfrm>
+            <a:off x="365760" y="1024128"/>
+            <a:ext cx="5120640" cy="231648"/>
+          </a:xfrm>
+          <a:prstGeom prst="rect">
+            <a:avLst/>
+          </a:prstGeom>
+          <a:noFill/>
+          <a:effectLst/>
+        </p:spPr>
+        <p:txBody>
+          <a:bodyPr wrap="none" lIns="18288" rIns="18288" tIns="18288" bIns="18288" anchor="t">
             <a:spAutoFit/>
           </a:bodyPr>
           <a:lstStyle/>
@@ -3197,58 +4111,256 @@
               </a:spcAft>
             </a:pPr>
             <a:r>
-              <a:rPr sz="1800" b="0" i="0">
+              <a:rPr sz="1200" b="0" i="0">
                 <a:solidFill>
                   <a:srgbClr val="E7F0F3"/>
                 </a:solidFill>
                 <a:latin typeface="Arial"/>
               </a:rPr>
-              <a:t>Pressure-work reservoir</a:t>
-            </a:r>
-          </a:p>
-        </p:txBody>
-      </p:sp>
-      <p:cxnSp>
-        <p:nvCxnSpPr>
-          <p:cNvPr id="5" name="C3-E11 arrow 3" descr="sci-ppt:o003"/>
-          <p:cNvCxnSpPr/>
-          <p:nvPr/>
-        </p:nvCxnSpPr>
-        <p:spPr>
-          <a:xfrm>
-            <a:off x="3794760" y="2057400"/>
-            <a:ext cx="640080" cy="0"/>
-          </a:xfrm>
-          <a:prstGeom prst="line">
-            <a:avLst/>
-          </a:prstGeom>
-          <a:ln w="25400">
+              <a:t>Rₘₐₓ,N / R_*</a:t>
+            </a:r>
+          </a:p>
+        </p:txBody>
+      </p:sp>
+      <p:sp>
+        <p:nvSpPr>
+          <p:cNvPr id="38" name="C3-E11 polygon 36" descr="sci-ppt:o036"/>
+          <p:cNvSpPr/>
+          <p:nvPr/>
+        </p:nvSpPr>
+        <p:spPr>
+          <a:xfrm>
+            <a:off x="914400" y="1695796"/>
+            <a:ext cx="5120640" cy="2133228"/>
+          </a:xfrm>
+          <a:custGeom>
+            <a:avLst/>
+            <a:gdLst/>
+            <a:ahLst/>
+            <a:cxnLst/>
+            <a:rect l="l" t="t" r="r" b="b"/>
+            <a:pathLst>
+              <a:path w="5120640" h="2133228">
+                <a:moveTo>
+                  <a:pt x="0" y="0"/>
+                </a:moveTo>
+                <a:lnTo>
+                  <a:pt x="213360" y="668815"/>
+                </a:lnTo>
+                <a:lnTo>
+                  <a:pt x="426720" y="994111"/>
+                </a:lnTo>
+                <a:lnTo>
+                  <a:pt x="640080" y="1199654"/>
+                </a:lnTo>
+                <a:lnTo>
+                  <a:pt x="853439" y="1346052"/>
+                </a:lnTo>
+                <a:lnTo>
+                  <a:pt x="1066800" y="1457842"/>
+                </a:lnTo>
+                <a:lnTo>
+                  <a:pt x="1280160" y="1547201"/>
+                </a:lnTo>
+                <a:lnTo>
+                  <a:pt x="1493520" y="1620982"/>
+                </a:lnTo>
+                <a:lnTo>
+                  <a:pt x="1706879" y="1683390"/>
+                </a:lnTo>
+                <a:lnTo>
+                  <a:pt x="1920239" y="1737177"/>
+                </a:lnTo>
+                <a:lnTo>
+                  <a:pt x="2133600" y="1784233"/>
+                </a:lnTo>
+                <a:lnTo>
+                  <a:pt x="2346960" y="1825905"/>
+                </a:lnTo>
+                <a:lnTo>
+                  <a:pt x="2560320" y="1863188"/>
+                </a:lnTo>
+                <a:lnTo>
+                  <a:pt x="2773680" y="1896830"/>
+                </a:lnTo>
+                <a:lnTo>
+                  <a:pt x="2987040" y="1927412"/>
+                </a:lnTo>
+                <a:lnTo>
+                  <a:pt x="3200400" y="1955389"/>
+                </a:lnTo>
+                <a:lnTo>
+                  <a:pt x="3413759" y="1981128"/>
+                </a:lnTo>
+                <a:lnTo>
+                  <a:pt x="3627120" y="2004923"/>
+                </a:lnTo>
+                <a:lnTo>
+                  <a:pt x="3840479" y="2027018"/>
+                </a:lnTo>
+                <a:lnTo>
+                  <a:pt x="4053839" y="2047614"/>
+                </a:lnTo>
+                <a:lnTo>
+                  <a:pt x="4267200" y="2066881"/>
+                </a:lnTo>
+                <a:lnTo>
+                  <a:pt x="4480559" y="2084962"/>
+                </a:lnTo>
+                <a:lnTo>
+                  <a:pt x="4693920" y="2101979"/>
+                </a:lnTo>
+                <a:lnTo>
+                  <a:pt x="4907280" y="2118037"/>
+                </a:lnTo>
+                <a:lnTo>
+                  <a:pt x="5120640" y="2133228"/>
+                </a:lnTo>
+              </a:path>
+            </a:pathLst>
+          </a:custGeom>
+          <a:noFill/>
+          <a:ln w="38100">
             <a:solidFill>
               <a:srgbClr val="8EDBD4"/>
             </a:solidFill>
-            <a:headEnd type="none" w="med" len="med"/>
-            <a:tailEnd type="triangle" w="med" len="med"/>
           </a:ln>
           <a:effectLst/>
         </p:spPr>
-      </p:cxnSp>
-      <p:sp>
-        <p:nvSpPr>
-          <p:cNvPr id="6" name="C3-E11 rect 4" descr="sci-ppt:o004"/>
+        <p:txBody>
+          <a:bodyPr rtlCol="0" anchor="ctr"/>
+          <a:lstStyle/>
+          <a:p>
+            <a:pPr algn="ctr"/>
+          </a:p>
+        </p:txBody>
+      </p:sp>
+      <p:sp>
+        <p:nvSpPr>
+          <p:cNvPr id="39" name="C3-E11 ellipse 37" descr="sci-ppt:o037"/>
           <p:cNvSpPr/>
           <p:nvPr/>
         </p:nvSpPr>
         <p:spPr>
           <a:xfrm>
-            <a:off x="4480560" y="1417320"/>
-            <a:ext cx="3200400" cy="1325880"/>
+            <a:off x="5961888" y="3755872"/>
+            <a:ext cx="146304" cy="146304"/>
+          </a:xfrm>
+          <a:prstGeom prst="ellipse">
+            <a:avLst/>
+          </a:prstGeom>
+          <a:solidFill>
+            <a:srgbClr val="F2B880"/>
+          </a:solidFill>
+          <a:ln w="12700">
+            <a:solidFill>
+              <a:srgbClr val="F2B880"/>
+            </a:solidFill>
+          </a:ln>
+          <a:effectLst/>
+        </p:spPr>
+        <p:txBody>
+          <a:bodyPr rtlCol="0" anchor="ctr"/>
+          <a:lstStyle/>
+          <a:p>
+            <a:pPr algn="ctr"/>
+          </a:p>
+        </p:txBody>
+      </p:sp>
+      <p:sp>
+        <p:nvSpPr>
+          <p:cNvPr id="40" name="C3-E11 text 38" descr="sci-ppt:o038"/>
+          <p:cNvSpPr txBox="1"/>
+          <p:nvPr/>
+        </p:nvSpPr>
+        <p:spPr>
+          <a:xfrm>
+            <a:off x="4480559" y="3371824"/>
+            <a:ext cx="1463040" cy="231648"/>
           </a:xfrm>
           <a:prstGeom prst="rect">
             <a:avLst/>
           </a:prstGeom>
-          <a:solidFill>
-            <a:srgbClr val="213E4B"/>
-          </a:solidFill>
+          <a:noFill/>
+          <a:effectLst/>
+        </p:spPr>
+        <p:txBody>
+          <a:bodyPr wrap="none" lIns="18288" rIns="18288" tIns="18288" bIns="18288" anchor="t">
+            <a:spAutoFit/>
+          </a:bodyPr>
+          <a:lstStyle/>
+          <a:p>
+            <a:pPr algn="l">
+              <a:spcAft>
+                <a:spcPts val="0"/>
+              </a:spcAft>
+            </a:pPr>
+            <a:r>
+              <a:rPr sz="1200" b="0" i="0">
+                <a:solidFill>
+                  <a:srgbClr val="F2B880"/>
+                </a:solidFill>
+                <a:latin typeface="Arial"/>
+              </a:rPr>
+              <a:t>N = 25: 0.342</a:t>
+            </a:r>
+          </a:p>
+        </p:txBody>
+      </p:sp>
+      <p:sp>
+        <p:nvSpPr>
+          <p:cNvPr id="41" name="C3-E11 text 39" descr="sci-ppt:o039"/>
+          <p:cNvSpPr txBox="1"/>
+          <p:nvPr/>
+        </p:nvSpPr>
+        <p:spPr>
+          <a:xfrm>
+            <a:off x="1200912" y="1766454"/>
+            <a:ext cx="2743200" cy="239395"/>
+          </a:xfrm>
+          <a:prstGeom prst="rect">
+            <a:avLst/>
+          </a:prstGeom>
+          <a:noFill/>
+          <a:effectLst/>
+        </p:spPr>
+        <p:txBody>
+          <a:bodyPr wrap="none" lIns="18288" rIns="18288" tIns="18288" bIns="18288" anchor="t">
+            <a:spAutoFit/>
+          </a:bodyPr>
+          <a:lstStyle/>
+          <a:p>
+            <a:pPr algn="l">
+              <a:spcAft>
+                <a:spcPts val="0"/>
+              </a:spcAft>
+            </a:pPr>
+            <a:r>
+              <a:rPr sz="1250" b="0" i="0">
+                <a:solidFill>
+                  <a:srgbClr val="8EDBD4"/>
+                </a:solidFill>
+                <a:latin typeface="Arial"/>
+              </a:rPr>
+              <a:t>Rₘₐₓ,N = R_* N^(−1/3)</a:t>
+            </a:r>
+          </a:p>
+        </p:txBody>
+      </p:sp>
+      <p:cxnSp>
+        <p:nvCxnSpPr>
+          <p:cNvPr id="42" name="C3-E11 line 40" descr="sci-ppt:o040"/>
+          <p:cNvCxnSpPr/>
+          <p:nvPr/>
+        </p:nvCxnSpPr>
+        <p:spPr>
+          <a:xfrm>
+            <a:off x="6766560" y="4937760"/>
+            <a:ext cx="5029200" cy="0"/>
+          </a:xfrm>
+          <a:prstGeom prst="line">
+            <a:avLst/>
+          </a:prstGeom>
           <a:ln w="19050">
             <a:solidFill>
               <a:srgbClr val="B4C7D2"/>
@@ -3256,24 +4368,83 @@
           </a:ln>
           <a:effectLst/>
         </p:spPr>
-        <p:txBody>
-          <a:bodyPr rtlCol="0" anchor="ctr"/>
-          <a:lstStyle/>
-          <a:p>
-            <a:pPr algn="ctr"/>
-          </a:p>
-        </p:txBody>
-      </p:sp>
-      <p:sp>
-        <p:nvSpPr>
-          <p:cNvPr id="7" name="C3-E11 text 5" descr="sci-ppt:o005"/>
+      </p:cxnSp>
+      <p:cxnSp>
+        <p:nvCxnSpPr>
+          <p:cNvPr id="43" name="C3-E11 line 41" descr="sci-ppt:o041"/>
+          <p:cNvCxnSpPr/>
+          <p:nvPr/>
+        </p:nvCxnSpPr>
+        <p:spPr>
+          <a:xfrm>
+            <a:off x="6766560" y="1371600"/>
+            <a:ext cx="0" cy="3566160"/>
+          </a:xfrm>
+          <a:prstGeom prst="line">
+            <a:avLst/>
+          </a:prstGeom>
+          <a:ln w="19050">
+            <a:solidFill>
+              <a:srgbClr val="B4C7D2"/>
+            </a:solidFill>
+          </a:ln>
+          <a:effectLst/>
+        </p:spPr>
+      </p:cxnSp>
+      <p:cxnSp>
+        <p:nvCxnSpPr>
+          <p:cNvPr id="44" name="C3-E11 line 42" descr="sci-ppt:o042"/>
+          <p:cNvCxnSpPr/>
+          <p:nvPr/>
+        </p:nvCxnSpPr>
+        <p:spPr>
+          <a:xfrm>
+            <a:off x="6766560" y="4937760"/>
+            <a:ext cx="0" cy="64008"/>
+          </a:xfrm>
+          <a:prstGeom prst="line">
+            <a:avLst/>
+          </a:prstGeom>
+          <a:ln w="12700">
+            <a:solidFill>
+              <a:srgbClr val="B4C7D2"/>
+            </a:solidFill>
+          </a:ln>
+          <a:effectLst/>
+        </p:spPr>
+      </p:cxnSp>
+      <p:cxnSp>
+        <p:nvCxnSpPr>
+          <p:cNvPr id="45" name="C3-E11 line 43" descr="sci-ppt:o043"/>
+          <p:cNvCxnSpPr/>
+          <p:nvPr/>
+        </p:nvCxnSpPr>
+        <p:spPr>
+          <a:xfrm>
+            <a:off x="6766560" y="1371600"/>
+            <a:ext cx="0" cy="3566160"/>
+          </a:xfrm>
+          <a:prstGeom prst="line">
+            <a:avLst/>
+          </a:prstGeom>
+          <a:ln w="7620">
+            <a:solidFill>
+              <a:srgbClr val="2E4756"/>
+            </a:solidFill>
+          </a:ln>
+          <a:effectLst/>
+        </p:spPr>
+      </p:cxnSp>
+      <p:sp>
+        <p:nvSpPr>
+          <p:cNvPr id="46" name="C3-E11 text 44" descr="sci-ppt:o044"/>
           <p:cNvSpPr txBox="1"/>
           <p:nvPr/>
         </p:nvSpPr>
         <p:spPr>
           <a:xfrm>
-            <a:off x="4645152" y="1627632"/>
-            <a:ext cx="2871216" cy="914400"/>
+            <a:off x="6309360" y="5020056"/>
+            <a:ext cx="914400" cy="208407"/>
           </a:xfrm>
           <a:prstGeom prst="rect">
             <a:avLst/>
@@ -3282,7 +4453,697 @@
           <a:effectLst/>
         </p:spPr>
         <p:txBody>
-          <a:bodyPr wrap="square" lIns="27432" rIns="27432" tIns="18288" bIns="18288" anchor="ctr">
+          <a:bodyPr wrap="none" lIns="18288" rIns="18288" tIns="18288" bIns="18288" anchor="t">
+            <a:spAutoFit/>
+          </a:bodyPr>
+          <a:lstStyle/>
+          <a:p>
+            <a:pPr algn="ctr">
+              <a:spcAft>
+                <a:spcPts val="0"/>
+              </a:spcAft>
+            </a:pPr>
+            <a:r>
+              <a:rPr sz="1050" b="0" i="0">
+                <a:solidFill>
+                  <a:srgbClr val="B4C7D2"/>
+                </a:solidFill>
+                <a:latin typeface="Arial"/>
+              </a:rPr>
+              <a:t>1</a:t>
+            </a:r>
+          </a:p>
+        </p:txBody>
+      </p:sp>
+      <p:cxnSp>
+        <p:nvCxnSpPr>
+          <p:cNvPr id="47" name="C3-E11 line 45" descr="sci-ppt:o045"/>
+          <p:cNvCxnSpPr/>
+          <p:nvPr/>
+        </p:nvCxnSpPr>
+        <p:spPr>
+          <a:xfrm>
+            <a:off x="7604760" y="4937760"/>
+            <a:ext cx="0" cy="64008"/>
+          </a:xfrm>
+          <a:prstGeom prst="line">
+            <a:avLst/>
+          </a:prstGeom>
+          <a:ln w="12700">
+            <a:solidFill>
+              <a:srgbClr val="B4C7D2"/>
+            </a:solidFill>
+          </a:ln>
+          <a:effectLst/>
+        </p:spPr>
+      </p:cxnSp>
+      <p:cxnSp>
+        <p:nvCxnSpPr>
+          <p:cNvPr id="48" name="C3-E11 line 46" descr="sci-ppt:o046"/>
+          <p:cNvCxnSpPr/>
+          <p:nvPr/>
+        </p:nvCxnSpPr>
+        <p:spPr>
+          <a:xfrm>
+            <a:off x="7604760" y="1371600"/>
+            <a:ext cx="0" cy="3566160"/>
+          </a:xfrm>
+          <a:prstGeom prst="line">
+            <a:avLst/>
+          </a:prstGeom>
+          <a:ln w="7620">
+            <a:solidFill>
+              <a:srgbClr val="2E4756"/>
+            </a:solidFill>
+          </a:ln>
+          <a:effectLst/>
+        </p:spPr>
+      </p:cxnSp>
+      <p:sp>
+        <p:nvSpPr>
+          <p:cNvPr id="49" name="C3-E11 text 47" descr="sci-ppt:o047"/>
+          <p:cNvSpPr txBox="1"/>
+          <p:nvPr/>
+        </p:nvSpPr>
+        <p:spPr>
+          <a:xfrm>
+            <a:off x="7147560" y="5020056"/>
+            <a:ext cx="914400" cy="208407"/>
+          </a:xfrm>
+          <a:prstGeom prst="rect">
+            <a:avLst/>
+          </a:prstGeom>
+          <a:noFill/>
+          <a:effectLst/>
+        </p:spPr>
+        <p:txBody>
+          <a:bodyPr wrap="none" lIns="18288" rIns="18288" tIns="18288" bIns="18288" anchor="t">
+            <a:spAutoFit/>
+          </a:bodyPr>
+          <a:lstStyle/>
+          <a:p>
+            <a:pPr algn="ctr">
+              <a:spcAft>
+                <a:spcPts val="0"/>
+              </a:spcAft>
+            </a:pPr>
+            <a:r>
+              <a:rPr sz="1050" b="0" i="0">
+                <a:solidFill>
+                  <a:srgbClr val="B4C7D2"/>
+                </a:solidFill>
+                <a:latin typeface="Arial"/>
+              </a:rPr>
+              <a:t>5</a:t>
+            </a:r>
+          </a:p>
+        </p:txBody>
+      </p:sp>
+      <p:cxnSp>
+        <p:nvCxnSpPr>
+          <p:cNvPr id="50" name="C3-E11 line 48" descr="sci-ppt:o048"/>
+          <p:cNvCxnSpPr/>
+          <p:nvPr/>
+        </p:nvCxnSpPr>
+        <p:spPr>
+          <a:xfrm>
+            <a:off x="8652510" y="4937760"/>
+            <a:ext cx="0" cy="64008"/>
+          </a:xfrm>
+          <a:prstGeom prst="line">
+            <a:avLst/>
+          </a:prstGeom>
+          <a:ln w="12700">
+            <a:solidFill>
+              <a:srgbClr val="B4C7D2"/>
+            </a:solidFill>
+          </a:ln>
+          <a:effectLst/>
+        </p:spPr>
+      </p:cxnSp>
+      <p:cxnSp>
+        <p:nvCxnSpPr>
+          <p:cNvPr id="51" name="C3-E11 line 49" descr="sci-ppt:o049"/>
+          <p:cNvCxnSpPr/>
+          <p:nvPr/>
+        </p:nvCxnSpPr>
+        <p:spPr>
+          <a:xfrm>
+            <a:off x="8652510" y="1371600"/>
+            <a:ext cx="0" cy="3566160"/>
+          </a:xfrm>
+          <a:prstGeom prst="line">
+            <a:avLst/>
+          </a:prstGeom>
+          <a:ln w="7620">
+            <a:solidFill>
+              <a:srgbClr val="2E4756"/>
+            </a:solidFill>
+          </a:ln>
+          <a:effectLst/>
+        </p:spPr>
+      </p:cxnSp>
+      <p:sp>
+        <p:nvSpPr>
+          <p:cNvPr id="52" name="C3-E11 text 50" descr="sci-ppt:o050"/>
+          <p:cNvSpPr txBox="1"/>
+          <p:nvPr/>
+        </p:nvSpPr>
+        <p:spPr>
+          <a:xfrm>
+            <a:off x="8195310" y="5020056"/>
+            <a:ext cx="914400" cy="208407"/>
+          </a:xfrm>
+          <a:prstGeom prst="rect">
+            <a:avLst/>
+          </a:prstGeom>
+          <a:noFill/>
+          <a:effectLst/>
+        </p:spPr>
+        <p:txBody>
+          <a:bodyPr wrap="none" lIns="18288" rIns="18288" tIns="18288" bIns="18288" anchor="t">
+            <a:spAutoFit/>
+          </a:bodyPr>
+          <a:lstStyle/>
+          <a:p>
+            <a:pPr algn="ctr">
+              <a:spcAft>
+                <a:spcPts val="0"/>
+              </a:spcAft>
+            </a:pPr>
+            <a:r>
+              <a:rPr sz="1050" b="0" i="0">
+                <a:solidFill>
+                  <a:srgbClr val="B4C7D2"/>
+                </a:solidFill>
+                <a:latin typeface="Arial"/>
+              </a:rPr>
+              <a:t>10</a:t>
+            </a:r>
+          </a:p>
+        </p:txBody>
+      </p:sp>
+      <p:cxnSp>
+        <p:nvCxnSpPr>
+          <p:cNvPr id="53" name="C3-E11 line 51" descr="sci-ppt:o051"/>
+          <p:cNvCxnSpPr/>
+          <p:nvPr/>
+        </p:nvCxnSpPr>
+        <p:spPr>
+          <a:xfrm>
+            <a:off x="9700260" y="4937760"/>
+            <a:ext cx="0" cy="64008"/>
+          </a:xfrm>
+          <a:prstGeom prst="line">
+            <a:avLst/>
+          </a:prstGeom>
+          <a:ln w="12700">
+            <a:solidFill>
+              <a:srgbClr val="B4C7D2"/>
+            </a:solidFill>
+          </a:ln>
+          <a:effectLst/>
+        </p:spPr>
+      </p:cxnSp>
+      <p:cxnSp>
+        <p:nvCxnSpPr>
+          <p:cNvPr id="54" name="C3-E11 line 52" descr="sci-ppt:o052"/>
+          <p:cNvCxnSpPr/>
+          <p:nvPr/>
+        </p:nvCxnSpPr>
+        <p:spPr>
+          <a:xfrm>
+            <a:off x="9700260" y="1371600"/>
+            <a:ext cx="0" cy="3566160"/>
+          </a:xfrm>
+          <a:prstGeom prst="line">
+            <a:avLst/>
+          </a:prstGeom>
+          <a:ln w="7620">
+            <a:solidFill>
+              <a:srgbClr val="2E4756"/>
+            </a:solidFill>
+          </a:ln>
+          <a:effectLst/>
+        </p:spPr>
+      </p:cxnSp>
+      <p:sp>
+        <p:nvSpPr>
+          <p:cNvPr id="55" name="C3-E11 text 53" descr="sci-ppt:o053"/>
+          <p:cNvSpPr txBox="1"/>
+          <p:nvPr/>
+        </p:nvSpPr>
+        <p:spPr>
+          <a:xfrm>
+            <a:off x="9243060" y="5020056"/>
+            <a:ext cx="914400" cy="208407"/>
+          </a:xfrm>
+          <a:prstGeom prst="rect">
+            <a:avLst/>
+          </a:prstGeom>
+          <a:noFill/>
+          <a:effectLst/>
+        </p:spPr>
+        <p:txBody>
+          <a:bodyPr wrap="none" lIns="18288" rIns="18288" tIns="18288" bIns="18288" anchor="t">
+            <a:spAutoFit/>
+          </a:bodyPr>
+          <a:lstStyle/>
+          <a:p>
+            <a:pPr algn="ctr">
+              <a:spcAft>
+                <a:spcPts val="0"/>
+              </a:spcAft>
+            </a:pPr>
+            <a:r>
+              <a:rPr sz="1050" b="0" i="0">
+                <a:solidFill>
+                  <a:srgbClr val="B4C7D2"/>
+                </a:solidFill>
+                <a:latin typeface="Arial"/>
+              </a:rPr>
+              <a:t>15</a:t>
+            </a:r>
+          </a:p>
+        </p:txBody>
+      </p:sp>
+      <p:cxnSp>
+        <p:nvCxnSpPr>
+          <p:cNvPr id="56" name="C3-E11 line 54" descr="sci-ppt:o054"/>
+          <p:cNvCxnSpPr/>
+          <p:nvPr/>
+        </p:nvCxnSpPr>
+        <p:spPr>
+          <a:xfrm>
+            <a:off x="10748010" y="4937760"/>
+            <a:ext cx="0" cy="64008"/>
+          </a:xfrm>
+          <a:prstGeom prst="line">
+            <a:avLst/>
+          </a:prstGeom>
+          <a:ln w="12700">
+            <a:solidFill>
+              <a:srgbClr val="B4C7D2"/>
+            </a:solidFill>
+          </a:ln>
+          <a:effectLst/>
+        </p:spPr>
+      </p:cxnSp>
+      <p:cxnSp>
+        <p:nvCxnSpPr>
+          <p:cNvPr id="57" name="C3-E11 line 55" descr="sci-ppt:o055"/>
+          <p:cNvCxnSpPr/>
+          <p:nvPr/>
+        </p:nvCxnSpPr>
+        <p:spPr>
+          <a:xfrm>
+            <a:off x="10748010" y="1371600"/>
+            <a:ext cx="0" cy="3566160"/>
+          </a:xfrm>
+          <a:prstGeom prst="line">
+            <a:avLst/>
+          </a:prstGeom>
+          <a:ln w="7620">
+            <a:solidFill>
+              <a:srgbClr val="2E4756"/>
+            </a:solidFill>
+          </a:ln>
+          <a:effectLst/>
+        </p:spPr>
+      </p:cxnSp>
+      <p:sp>
+        <p:nvSpPr>
+          <p:cNvPr id="58" name="C3-E11 text 56" descr="sci-ppt:o056"/>
+          <p:cNvSpPr txBox="1"/>
+          <p:nvPr/>
+        </p:nvSpPr>
+        <p:spPr>
+          <a:xfrm>
+            <a:off x="10290810" y="5020056"/>
+            <a:ext cx="914400" cy="208407"/>
+          </a:xfrm>
+          <a:prstGeom prst="rect">
+            <a:avLst/>
+          </a:prstGeom>
+          <a:noFill/>
+          <a:effectLst/>
+        </p:spPr>
+        <p:txBody>
+          <a:bodyPr wrap="none" lIns="18288" rIns="18288" tIns="18288" bIns="18288" anchor="t">
+            <a:spAutoFit/>
+          </a:bodyPr>
+          <a:lstStyle/>
+          <a:p>
+            <a:pPr algn="ctr">
+              <a:spcAft>
+                <a:spcPts val="0"/>
+              </a:spcAft>
+            </a:pPr>
+            <a:r>
+              <a:rPr sz="1050" b="0" i="0">
+                <a:solidFill>
+                  <a:srgbClr val="B4C7D2"/>
+                </a:solidFill>
+                <a:latin typeface="Arial"/>
+              </a:rPr>
+              <a:t>20</a:t>
+            </a:r>
+          </a:p>
+        </p:txBody>
+      </p:sp>
+      <p:cxnSp>
+        <p:nvCxnSpPr>
+          <p:cNvPr id="59" name="C3-E11 line 57" descr="sci-ppt:o057"/>
+          <p:cNvCxnSpPr/>
+          <p:nvPr/>
+        </p:nvCxnSpPr>
+        <p:spPr>
+          <a:xfrm>
+            <a:off x="11795760" y="4937760"/>
+            <a:ext cx="0" cy="64008"/>
+          </a:xfrm>
+          <a:prstGeom prst="line">
+            <a:avLst/>
+          </a:prstGeom>
+          <a:ln w="12700">
+            <a:solidFill>
+              <a:srgbClr val="B4C7D2"/>
+            </a:solidFill>
+          </a:ln>
+          <a:effectLst/>
+        </p:spPr>
+      </p:cxnSp>
+      <p:cxnSp>
+        <p:nvCxnSpPr>
+          <p:cNvPr id="60" name="C3-E11 line 58" descr="sci-ppt:o058"/>
+          <p:cNvCxnSpPr/>
+          <p:nvPr/>
+        </p:nvCxnSpPr>
+        <p:spPr>
+          <a:xfrm>
+            <a:off x="11795760" y="1371600"/>
+            <a:ext cx="0" cy="3566160"/>
+          </a:xfrm>
+          <a:prstGeom prst="line">
+            <a:avLst/>
+          </a:prstGeom>
+          <a:ln w="7620">
+            <a:solidFill>
+              <a:srgbClr val="2E4756"/>
+            </a:solidFill>
+          </a:ln>
+          <a:effectLst/>
+        </p:spPr>
+      </p:cxnSp>
+      <p:sp>
+        <p:nvSpPr>
+          <p:cNvPr id="61" name="C3-E11 text 59" descr="sci-ppt:o059"/>
+          <p:cNvSpPr txBox="1"/>
+          <p:nvPr/>
+        </p:nvSpPr>
+        <p:spPr>
+          <a:xfrm>
+            <a:off x="11338560" y="5020056"/>
+            <a:ext cx="914400" cy="208407"/>
+          </a:xfrm>
+          <a:prstGeom prst="rect">
+            <a:avLst/>
+          </a:prstGeom>
+          <a:noFill/>
+          <a:effectLst/>
+        </p:spPr>
+        <p:txBody>
+          <a:bodyPr wrap="none" lIns="18288" rIns="18288" tIns="18288" bIns="18288" anchor="t">
+            <a:spAutoFit/>
+          </a:bodyPr>
+          <a:lstStyle/>
+          <a:p>
+            <a:pPr algn="ctr">
+              <a:spcAft>
+                <a:spcPts val="0"/>
+              </a:spcAft>
+            </a:pPr>
+            <a:r>
+              <a:rPr sz="1050" b="0" i="0">
+                <a:solidFill>
+                  <a:srgbClr val="B4C7D2"/>
+                </a:solidFill>
+                <a:latin typeface="Arial"/>
+              </a:rPr>
+              <a:t>25</a:t>
+            </a:r>
+          </a:p>
+        </p:txBody>
+      </p:sp>
+      <p:cxnSp>
+        <p:nvCxnSpPr>
+          <p:cNvPr id="62" name="C3-E11 line 60" descr="sci-ppt:o060"/>
+          <p:cNvCxnSpPr/>
+          <p:nvPr/>
+        </p:nvCxnSpPr>
+        <p:spPr>
+          <a:xfrm>
+            <a:off x="6702552" y="4937760"/>
+            <a:ext cx="64008" cy="0"/>
+          </a:xfrm>
+          <a:prstGeom prst="line">
+            <a:avLst/>
+          </a:prstGeom>
+          <a:ln w="12700">
+            <a:solidFill>
+              <a:srgbClr val="B4C7D2"/>
+            </a:solidFill>
+          </a:ln>
+          <a:effectLst/>
+        </p:spPr>
+      </p:cxnSp>
+      <p:cxnSp>
+        <p:nvCxnSpPr>
+          <p:cNvPr id="63" name="C3-E11 line 61" descr="sci-ppt:o061"/>
+          <p:cNvCxnSpPr/>
+          <p:nvPr/>
+        </p:nvCxnSpPr>
+        <p:spPr>
+          <a:xfrm>
+            <a:off x="6702552" y="3316778"/>
+            <a:ext cx="64008" cy="0"/>
+          </a:xfrm>
+          <a:prstGeom prst="line">
+            <a:avLst/>
+          </a:prstGeom>
+          <a:ln w="12700">
+            <a:solidFill>
+              <a:srgbClr val="B4C7D2"/>
+            </a:solidFill>
+          </a:ln>
+          <a:effectLst/>
+        </p:spPr>
+      </p:cxnSp>
+      <p:cxnSp>
+        <p:nvCxnSpPr>
+          <p:cNvPr id="64" name="C3-E11 line 62" descr="sci-ppt:o062"/>
+          <p:cNvCxnSpPr/>
+          <p:nvPr/>
+        </p:nvCxnSpPr>
+        <p:spPr>
+          <a:xfrm>
+            <a:off x="6766560" y="3316778"/>
+            <a:ext cx="5029200" cy="0"/>
+          </a:xfrm>
+          <a:prstGeom prst="line">
+            <a:avLst/>
+          </a:prstGeom>
+          <a:ln w="7620">
+            <a:solidFill>
+              <a:srgbClr val="2E4756"/>
+            </a:solidFill>
+          </a:ln>
+          <a:effectLst/>
+        </p:spPr>
+      </p:cxnSp>
+      <p:sp>
+        <p:nvSpPr>
+          <p:cNvPr id="65" name="C3-E11 text 63" descr="sci-ppt:o063"/>
+          <p:cNvSpPr txBox="1"/>
+          <p:nvPr/>
+        </p:nvSpPr>
+        <p:spPr>
+          <a:xfrm>
+            <a:off x="5897880" y="3234482"/>
+            <a:ext cx="777240" cy="208407"/>
+          </a:xfrm>
+          <a:prstGeom prst="rect">
+            <a:avLst/>
+          </a:prstGeom>
+          <a:noFill/>
+          <a:effectLst/>
+        </p:spPr>
+        <p:txBody>
+          <a:bodyPr wrap="none" lIns="18288" rIns="18288" tIns="18288" bIns="18288" anchor="t">
+            <a:spAutoFit/>
+          </a:bodyPr>
+          <a:lstStyle/>
+          <a:p>
+            <a:pPr algn="r">
+              <a:spcAft>
+                <a:spcPts val="0"/>
+              </a:spcAft>
+            </a:pPr>
+            <a:r>
+              <a:rPr sz="1050" b="0" i="0">
+                <a:solidFill>
+                  <a:srgbClr val="B4C7D2"/>
+                </a:solidFill>
+                <a:latin typeface="Arial"/>
+              </a:rPr>
+              <a:t>0.5</a:t>
+            </a:r>
+          </a:p>
+        </p:txBody>
+      </p:sp>
+      <p:cxnSp>
+        <p:nvCxnSpPr>
+          <p:cNvPr id="66" name="C3-E11 line 64" descr="sci-ppt:o064"/>
+          <p:cNvCxnSpPr/>
+          <p:nvPr/>
+        </p:nvCxnSpPr>
+        <p:spPr>
+          <a:xfrm>
+            <a:off x="6702552" y="1695796"/>
+            <a:ext cx="64008" cy="0"/>
+          </a:xfrm>
+          <a:prstGeom prst="line">
+            <a:avLst/>
+          </a:prstGeom>
+          <a:ln w="12700">
+            <a:solidFill>
+              <a:srgbClr val="B4C7D2"/>
+            </a:solidFill>
+          </a:ln>
+          <a:effectLst/>
+        </p:spPr>
+      </p:cxnSp>
+      <p:cxnSp>
+        <p:nvCxnSpPr>
+          <p:cNvPr id="67" name="C3-E11 line 65" descr="sci-ppt:o065"/>
+          <p:cNvCxnSpPr/>
+          <p:nvPr/>
+        </p:nvCxnSpPr>
+        <p:spPr>
+          <a:xfrm>
+            <a:off x="6766560" y="1695796"/>
+            <a:ext cx="5029200" cy="0"/>
+          </a:xfrm>
+          <a:prstGeom prst="line">
+            <a:avLst/>
+          </a:prstGeom>
+          <a:ln w="7620">
+            <a:solidFill>
+              <a:srgbClr val="2E4756"/>
+            </a:solidFill>
+          </a:ln>
+          <a:effectLst/>
+        </p:spPr>
+      </p:cxnSp>
+      <p:sp>
+        <p:nvSpPr>
+          <p:cNvPr id="68" name="C3-E11 text 66" descr="sci-ppt:o066"/>
+          <p:cNvSpPr txBox="1"/>
+          <p:nvPr/>
+        </p:nvSpPr>
+        <p:spPr>
+          <a:xfrm>
+            <a:off x="5897880" y="1613500"/>
+            <a:ext cx="777240" cy="208407"/>
+          </a:xfrm>
+          <a:prstGeom prst="rect">
+            <a:avLst/>
+          </a:prstGeom>
+          <a:noFill/>
+          <a:effectLst/>
+        </p:spPr>
+        <p:txBody>
+          <a:bodyPr wrap="none" lIns="18288" rIns="18288" tIns="18288" bIns="18288" anchor="t">
+            <a:spAutoFit/>
+          </a:bodyPr>
+          <a:lstStyle/>
+          <a:p>
+            <a:pPr algn="r">
+              <a:spcAft>
+                <a:spcPts val="0"/>
+              </a:spcAft>
+            </a:pPr>
+            <a:r>
+              <a:rPr sz="1050" b="0" i="0">
+                <a:solidFill>
+                  <a:srgbClr val="B4C7D2"/>
+                </a:solidFill>
+                <a:latin typeface="Arial"/>
+              </a:rPr>
+              <a:t>1.0</a:t>
+            </a:r>
+          </a:p>
+        </p:txBody>
+      </p:sp>
+      <p:sp>
+        <p:nvSpPr>
+          <p:cNvPr id="69" name="C3-E11 text 67" descr="sci-ppt:o067"/>
+          <p:cNvSpPr txBox="1"/>
+          <p:nvPr/>
+        </p:nvSpPr>
+        <p:spPr>
+          <a:xfrm>
+            <a:off x="6766560" y="5221224"/>
+            <a:ext cx="5029200" cy="231648"/>
+          </a:xfrm>
+          <a:prstGeom prst="rect">
+            <a:avLst/>
+          </a:prstGeom>
+          <a:noFill/>
+          <a:effectLst/>
+        </p:spPr>
+        <p:txBody>
+          <a:bodyPr wrap="none" lIns="18288" rIns="18288" tIns="18288" bIns="18288" anchor="t">
+            <a:spAutoFit/>
+          </a:bodyPr>
+          <a:lstStyle/>
+          <a:p>
+            <a:pPr algn="ctr">
+              <a:spcAft>
+                <a:spcPts val="0"/>
+              </a:spcAft>
+            </a:pPr>
+            <a:r>
+              <a:rPr sz="1200" b="0" i="0">
+                <a:solidFill>
+                  <a:srgbClr val="E7F0F3"/>
+                </a:solidFill>
+                <a:latin typeface="Arial"/>
+              </a:rPr>
+              <a:t>number of bubbles N</a:t>
+            </a:r>
+          </a:p>
+        </p:txBody>
+      </p:sp>
+      <p:sp>
+        <p:nvSpPr>
+          <p:cNvPr id="70" name="C3-E11 text 68" descr="sci-ppt:o068"/>
+          <p:cNvSpPr txBox="1"/>
+          <p:nvPr/>
+        </p:nvSpPr>
+        <p:spPr>
+          <a:xfrm>
+            <a:off x="6217920" y="1024128"/>
+            <a:ext cx="5029200" cy="231648"/>
+          </a:xfrm>
+          <a:prstGeom prst="rect">
+            <a:avLst/>
+          </a:prstGeom>
+          <a:noFill/>
+          <a:effectLst/>
+        </p:spPr>
+        <p:txBody>
+          <a:bodyPr wrap="none" lIns="18288" rIns="18288" tIns="18288" bIns="18288" anchor="t">
             <a:spAutoFit/>
           </a:bodyPr>
           <a:lstStyle/>
@@ -3293,92 +5154,263 @@
               </a:spcAft>
             </a:pPr>
             <a:r>
-              <a:rPr sz="1800" b="0" i="0">
+              <a:rPr sz="1200" b="0" i="0">
                 <a:solidFill>
                   <a:srgbClr val="E7F0F3"/>
                 </a:solidFill>
                 <a:latin typeface="Arial"/>
               </a:rPr>
-              <a:t>K_N: self + pair kinetic energy</a:t>
-            </a:r>
-          </a:p>
-        </p:txBody>
-      </p:sp>
-      <p:cxnSp>
-        <p:nvCxnSpPr>
-          <p:cNvPr id="8" name="C3-E11 arrow 6" descr="sci-ppt:o006"/>
-          <p:cNvCxnSpPr/>
-          <p:nvPr/>
-        </p:nvCxnSpPr>
-        <p:spPr>
-          <a:xfrm>
-            <a:off x="7680960" y="2057400"/>
-            <a:ext cx="640080" cy="0"/>
-          </a:xfrm>
-          <a:prstGeom prst="line">
-            <a:avLst/>
-          </a:prstGeom>
-          <a:ln w="25400">
+              <a:t>energy (relative to isolated)</a:t>
+            </a:r>
+          </a:p>
+        </p:txBody>
+      </p:sp>
+      <p:sp>
+        <p:nvSpPr>
+          <p:cNvPr id="71" name="C3-E11 polygon 69" descr="sci-ppt:o069"/>
+          <p:cNvSpPr/>
+          <p:nvPr/>
+        </p:nvSpPr>
+        <p:spPr>
+          <a:xfrm>
+            <a:off x="6766560" y="1695796"/>
+            <a:ext cx="5029200" cy="0"/>
+          </a:xfrm>
+          <a:custGeom>
+            <a:avLst/>
+            <a:gdLst/>
+            <a:ahLst/>
+            <a:cxnLst/>
+            <a:rect l="l" t="t" r="r" b="b"/>
+            <a:pathLst>
+              <a:path w="5029200" h="0">
+                <a:moveTo>
+                  <a:pt x="0" y="0"/>
+                </a:moveTo>
+                <a:lnTo>
+                  <a:pt x="209550" y="0"/>
+                </a:lnTo>
+                <a:lnTo>
+                  <a:pt x="419100" y="0"/>
+                </a:lnTo>
+                <a:lnTo>
+                  <a:pt x="628650" y="0"/>
+                </a:lnTo>
+                <a:lnTo>
+                  <a:pt x="838200" y="0"/>
+                </a:lnTo>
+                <a:lnTo>
+                  <a:pt x="1047750" y="0"/>
+                </a:lnTo>
+                <a:lnTo>
+                  <a:pt x="1257300" y="0"/>
+                </a:lnTo>
+                <a:lnTo>
+                  <a:pt x="1466850" y="0"/>
+                </a:lnTo>
+                <a:lnTo>
+                  <a:pt x="1676400" y="0"/>
+                </a:lnTo>
+                <a:lnTo>
+                  <a:pt x="1885950" y="0"/>
+                </a:lnTo>
+                <a:lnTo>
+                  <a:pt x="2095500" y="0"/>
+                </a:lnTo>
+                <a:lnTo>
+                  <a:pt x="2305050" y="0"/>
+                </a:lnTo>
+                <a:lnTo>
+                  <a:pt x="2514600" y="0"/>
+                </a:lnTo>
+                <a:lnTo>
+                  <a:pt x="2724150" y="0"/>
+                </a:lnTo>
+                <a:lnTo>
+                  <a:pt x="2933700" y="0"/>
+                </a:lnTo>
+                <a:lnTo>
+                  <a:pt x="3143250" y="0"/>
+                </a:lnTo>
+                <a:lnTo>
+                  <a:pt x="3352800" y="0"/>
+                </a:lnTo>
+                <a:lnTo>
+                  <a:pt x="3562350" y="0"/>
+                </a:lnTo>
+                <a:lnTo>
+                  <a:pt x="3771900" y="0"/>
+                </a:lnTo>
+                <a:lnTo>
+                  <a:pt x="3981450" y="0"/>
+                </a:lnTo>
+                <a:lnTo>
+                  <a:pt x="4191000" y="0"/>
+                </a:lnTo>
+                <a:lnTo>
+                  <a:pt x="4400550" y="0"/>
+                </a:lnTo>
+                <a:lnTo>
+                  <a:pt x="4610100" y="0"/>
+                </a:lnTo>
+                <a:lnTo>
+                  <a:pt x="4819650" y="0"/>
+                </a:lnTo>
+                <a:lnTo>
+                  <a:pt x="5029200" y="0"/>
+                </a:lnTo>
+              </a:path>
+            </a:pathLst>
+          </a:custGeom>
+          <a:noFill/>
+          <a:ln w="38100">
+            <a:solidFill>
+              <a:srgbClr val="F2B880"/>
+            </a:solidFill>
+          </a:ln>
+          <a:effectLst/>
+        </p:spPr>
+        <p:txBody>
+          <a:bodyPr rtlCol="0" anchor="ctr"/>
+          <a:lstStyle/>
+          <a:p>
+            <a:pPr algn="ctr"/>
+          </a:p>
+        </p:txBody>
+      </p:sp>
+      <p:sp>
+        <p:nvSpPr>
+          <p:cNvPr id="72" name="C3-E11 polygon 70" descr="sci-ppt:o070"/>
+          <p:cNvSpPr/>
+          <p:nvPr/>
+        </p:nvSpPr>
+        <p:spPr>
+          <a:xfrm>
+            <a:off x="6766560" y="1695796"/>
+            <a:ext cx="5029200" cy="3112285"/>
+          </a:xfrm>
+          <a:custGeom>
+            <a:avLst/>
+            <a:gdLst/>
+            <a:ahLst/>
+            <a:cxnLst/>
+            <a:rect l="l" t="t" r="r" b="b"/>
+            <a:pathLst>
+              <a:path w="5029200" h="3112285">
+                <a:moveTo>
+                  <a:pt x="0" y="0"/>
+                </a:moveTo>
+                <a:lnTo>
+                  <a:pt x="209550" y="1620982"/>
+                </a:lnTo>
+                <a:lnTo>
+                  <a:pt x="419100" y="2161309"/>
+                </a:lnTo>
+                <a:lnTo>
+                  <a:pt x="628650" y="2431473"/>
+                </a:lnTo>
+                <a:lnTo>
+                  <a:pt x="838200" y="2593571"/>
+                </a:lnTo>
+                <a:lnTo>
+                  <a:pt x="1047750" y="2701636"/>
+                </a:lnTo>
+                <a:lnTo>
+                  <a:pt x="1257300" y="2778826"/>
+                </a:lnTo>
+                <a:lnTo>
+                  <a:pt x="1466850" y="2836718"/>
+                </a:lnTo>
+                <a:lnTo>
+                  <a:pt x="1676400" y="2881745"/>
+                </a:lnTo>
+                <a:lnTo>
+                  <a:pt x="1885950" y="2917767"/>
+                </a:lnTo>
+                <a:lnTo>
+                  <a:pt x="2095500" y="2947240"/>
+                </a:lnTo>
+                <a:lnTo>
+                  <a:pt x="2305050" y="2971800"/>
+                </a:lnTo>
+                <a:lnTo>
+                  <a:pt x="2514600" y="2992582"/>
+                </a:lnTo>
+                <a:lnTo>
+                  <a:pt x="2724150" y="3010395"/>
+                </a:lnTo>
+                <a:lnTo>
+                  <a:pt x="2933700" y="3025833"/>
+                </a:lnTo>
+                <a:lnTo>
+                  <a:pt x="3143250" y="3039341"/>
+                </a:lnTo>
+                <a:lnTo>
+                  <a:pt x="3352800" y="3051260"/>
+                </a:lnTo>
+                <a:lnTo>
+                  <a:pt x="3562350" y="3061854"/>
+                </a:lnTo>
+                <a:lnTo>
+                  <a:pt x="3771900" y="3071334"/>
+                </a:lnTo>
+                <a:lnTo>
+                  <a:pt x="3981450" y="3079865"/>
+                </a:lnTo>
+                <a:lnTo>
+                  <a:pt x="4191000" y="3087584"/>
+                </a:lnTo>
+                <a:lnTo>
+                  <a:pt x="4400550" y="3094602"/>
+                </a:lnTo>
+                <a:lnTo>
+                  <a:pt x="4610100" y="3101009"/>
+                </a:lnTo>
+                <a:lnTo>
+                  <a:pt x="4819650" y="3106882"/>
+                </a:lnTo>
+                <a:lnTo>
+                  <a:pt x="5029200" y="3112285"/>
+                </a:lnTo>
+              </a:path>
+            </a:pathLst>
+          </a:custGeom>
+          <a:noFill/>
+          <a:ln w="38100">
             <a:solidFill>
               <a:srgbClr val="8EDBD4"/>
             </a:solidFill>
-            <a:headEnd type="none" w="med" len="med"/>
-            <a:tailEnd type="triangle" w="med" len="med"/>
+            <a:prstDash val="dash"/>
           </a:ln>
           <a:effectLst/>
         </p:spPr>
-      </p:cxnSp>
-      <p:sp>
-        <p:nvSpPr>
-          <p:cNvPr id="9" name="C3-E11 rect 7" descr="sci-ppt:o007"/>
-          <p:cNvSpPr/>
-          <p:nvPr/>
-        </p:nvSpPr>
-        <p:spPr>
-          <a:xfrm>
-            <a:off x="8366760" y="1417320"/>
-            <a:ext cx="3200400" cy="1325880"/>
+        <p:txBody>
+          <a:bodyPr rtlCol="0" anchor="ctr"/>
+          <a:lstStyle/>
+          <a:p>
+            <a:pPr algn="ctr"/>
+          </a:p>
+        </p:txBody>
+      </p:sp>
+      <p:sp>
+        <p:nvSpPr>
+          <p:cNvPr id="73" name="C3-E11 text 71" descr="sci-ppt:o071"/>
+          <p:cNvSpPr txBox="1"/>
+          <p:nvPr/>
+        </p:nvSpPr>
+        <p:spPr>
+          <a:xfrm>
+            <a:off x="7258812" y="1348324"/>
+            <a:ext cx="3840480" cy="223900"/>
           </a:xfrm>
           <a:prstGeom prst="rect">
             <a:avLst/>
           </a:prstGeom>
-          <a:solidFill>
-            <a:srgbClr val="213E4B"/>
-          </a:solidFill>
-          <a:ln w="19050">
-            <a:solidFill>
-              <a:srgbClr val="B4C7D2"/>
-            </a:solidFill>
-          </a:ln>
-          <a:effectLst/>
-        </p:spPr>
-        <p:txBody>
-          <a:bodyPr rtlCol="0" anchor="ctr"/>
-          <a:lstStyle/>
-          <a:p>
-            <a:pPr algn="ctr"/>
-          </a:p>
-        </p:txBody>
-      </p:sp>
-      <p:sp>
-        <p:nvSpPr>
-          <p:cNvPr id="10" name="C3-E11 text 8" descr="sci-ppt:o008"/>
-          <p:cNvSpPr txBox="1"/>
-          <p:nvPr/>
-        </p:nvSpPr>
-        <p:spPr>
-          <a:xfrm>
-            <a:off x="8531352" y="1627632"/>
-            <a:ext cx="2871216" cy="914400"/>
-          </a:xfrm>
-          <a:prstGeom prst="rect">
-            <a:avLst/>
-          </a:prstGeom>
           <a:noFill/>
           <a:effectLst/>
         </p:spPr>
         <p:txBody>
-          <a:bodyPr wrap="square" lIns="27432" rIns="27432" tIns="18288" bIns="18288" anchor="ctr">
+          <a:bodyPr wrap="none" lIns="18288" rIns="18288" tIns="18288" bIns="18288" anchor="t">
             <a:spAutoFit/>
           </a:bodyPr>
           <a:lstStyle/>
@@ -3389,27 +5421,27 @@
               </a:spcAft>
             </a:pPr>
             <a:r>
-              <a:rPr sz="1800" b="0" i="0">
+              <a:rPr sz="1150" b="0" i="0">
                 <a:solidFill>
-                  <a:srgbClr val="E7F0F3"/>
+                  <a:srgbClr val="F2B880"/>
                 </a:solidFill>
                 <a:latin typeface="Arial"/>
               </a:rPr>
-              <a:t>K_N + remaining work: conserved</a:t>
-            </a:r>
-          </a:p>
-        </p:txBody>
-      </p:sp>
-      <p:sp>
-        <p:nvSpPr>
-          <p:cNvPr id="11" name="C3-E11 text 9" descr="sci-ppt:o009"/>
+              <a:t>total work E_B,tot = (4π/3)Δp_c R_*³: fixed</a:t>
+            </a:r>
+          </a:p>
+        </p:txBody>
+      </p:sp>
+      <p:sp>
+        <p:nvSpPr>
+          <p:cNvPr id="74" name="C3-E11 text 72" descr="sci-ppt:o072"/>
           <p:cNvSpPr txBox="1"/>
           <p:nvPr/>
         </p:nvSpPr>
         <p:spPr>
           <a:xfrm>
-            <a:off x="731520" y="3246120"/>
-            <a:ext cx="10789920" cy="457200"/>
+            <a:off x="8306562" y="3873730"/>
+            <a:ext cx="2926080" cy="223900"/>
           </a:xfrm>
           <a:prstGeom prst="rect">
             <a:avLst/>
@@ -3418,509 +5450,7 @@
           <a:effectLst/>
         </p:spPr>
         <p:txBody>
-          <a:bodyPr wrap="square" lIns="27432" rIns="27432" tIns="18288" bIns="18288" anchor="ctr">
-            <a:spAutoFit/>
-          </a:bodyPr>
-          <a:lstStyle/>
-          <a:p>
-            <a:pPr algn="l">
-              <a:spcAft>
-                <a:spcPts val="0"/>
-              </a:spcAft>
-            </a:pPr>
-            <a:r>
-              <a:rPr sz="1800" b="0" i="0">
-                <a:solidFill>
-                  <a:srgbClr val="8EDBD4"/>
-                </a:solidFill>
-                <a:latin typeface="Arial"/>
-              </a:rPr>
-              <a:t>Each energy allocation belongs to the same finite source budget.</a:t>
-            </a:r>
-          </a:p>
-        </p:txBody>
-      </p:sp>
-      <p:cxnSp>
-        <p:nvCxnSpPr>
-          <p:cNvPr id="12" name="C3-E11 line 10" descr="sci-ppt:o010"/>
-          <p:cNvCxnSpPr/>
-          <p:nvPr/>
-        </p:nvCxnSpPr>
-        <p:spPr>
-          <a:xfrm>
-            <a:off x="274320" y="3977639"/>
-            <a:ext cx="11612880" cy="0"/>
-          </a:xfrm>
-          <a:prstGeom prst="line">
-            <a:avLst/>
-          </a:prstGeom>
-          <a:ln w="12700">
-            <a:solidFill>
-              <a:srgbClr val="405967"/>
-            </a:solidFill>
-          </a:ln>
-          <a:effectLst/>
-        </p:spPr>
-      </p:cxnSp>
-      <p:sp>
-        <p:nvSpPr>
-          <p:cNvPr id="13" name="C3-E11 text 11" descr="sci-ppt:o011"/>
-          <p:cNvSpPr txBox="1"/>
-          <p:nvPr/>
-        </p:nvSpPr>
-        <p:spPr>
-          <a:xfrm>
-            <a:off x="320040" y="4096512"/>
-            <a:ext cx="5715000" cy="246888"/>
-          </a:xfrm>
-          <a:prstGeom prst="rect">
-            <a:avLst/>
-          </a:prstGeom>
-          <a:noFill/>
-          <a:effectLst/>
-        </p:spPr>
-        <p:txBody>
-          <a:bodyPr wrap="square" lIns="27432" rIns="27432" tIns="18288" bIns="18288" anchor="ctr">
-            <a:spAutoFit/>
-          </a:bodyPr>
-          <a:lstStyle/>
-          <a:p>
-            <a:pPr algn="l">
-              <a:spcAft>
-                <a:spcPts val="0"/>
-              </a:spcAft>
-            </a:pPr>
-            <a:r>
-              <a:rPr sz="1150" b="0" i="0">
-                <a:solidFill>
-                  <a:srgbClr val="B4C7D2"/>
-                </a:solidFill>
-                <a:latin typeface="Arial"/>
-              </a:rPr>
-              <a:t>• N, i, j bubble count/indices</a:t>
-            </a:r>
-          </a:p>
-        </p:txBody>
-      </p:sp>
-      <p:sp>
-        <p:nvSpPr>
-          <p:cNvPr id="14" name="C3-E11 text 12" descr="sci-ppt:o012"/>
-          <p:cNvSpPr txBox="1"/>
-          <p:nvPr/>
-        </p:nvSpPr>
-        <p:spPr>
-          <a:xfrm>
-            <a:off x="6217920" y="4096512"/>
-            <a:ext cx="5715000" cy="246888"/>
-          </a:xfrm>
-          <a:prstGeom prst="rect">
-            <a:avLst/>
-          </a:prstGeom>
-          <a:noFill/>
-          <a:effectLst/>
-        </p:spPr>
-        <p:txBody>
-          <a:bodyPr wrap="square" lIns="27432" rIns="27432" tIns="18288" bIns="18288" anchor="ctr">
-            <a:spAutoFit/>
-          </a:bodyPr>
-          <a:lstStyle/>
-          <a:p>
-            <a:pPr algn="l">
-              <a:spcAft>
-                <a:spcPts val="0"/>
-              </a:spcAft>
-            </a:pPr>
-            <a:r>
-              <a:rPr sz="1150" b="0" i="0">
-                <a:solidFill>
-                  <a:srgbClr val="B4C7D2"/>
-                </a:solidFill>
-                <a:latin typeface="Arial"/>
-              </a:rPr>
-              <a:t>• R_i, R_j, R, R_max, Ṙ_i, Ṙ_j, Ṙ</a:t>
-            </a:r>
-          </a:p>
-        </p:txBody>
-      </p:sp>
-      <p:sp>
-        <p:nvSpPr>
-          <p:cNvPr id="15" name="C3-E11 text 13" descr="sci-ppt:o013"/>
-          <p:cNvSpPr txBox="1"/>
-          <p:nvPr/>
-        </p:nvSpPr>
-        <p:spPr>
-          <a:xfrm>
-            <a:off x="320040" y="4329684"/>
-            <a:ext cx="5715000" cy="246888"/>
-          </a:xfrm>
-          <a:prstGeom prst="rect">
-            <a:avLst/>
-          </a:prstGeom>
-          <a:noFill/>
-          <a:effectLst/>
-        </p:spPr>
-        <p:txBody>
-          <a:bodyPr wrap="square" lIns="27432" rIns="27432" tIns="18288" bIns="18288" anchor="ctr">
-            <a:spAutoFit/>
-          </a:bodyPr>
-          <a:lstStyle/>
-          <a:p>
-            <a:pPr algn="l">
-              <a:spcAft>
-                <a:spcPts val="0"/>
-              </a:spcAft>
-            </a:pPr>
-            <a:r>
-              <a:rPr sz="1150" b="0" i="0">
-                <a:solidFill>
-                  <a:srgbClr val="B4C7D2"/>
-                </a:solidFill>
-                <a:latin typeface="Arial"/>
-              </a:rPr>
-              <a:t>• r_i, d_ij radial/center distances</a:t>
-            </a:r>
-          </a:p>
-        </p:txBody>
-      </p:sp>
-      <p:sp>
-        <p:nvSpPr>
-          <p:cNvPr id="16" name="C3-E11 text 14" descr="sci-ppt:o014"/>
-          <p:cNvSpPr txBox="1"/>
-          <p:nvPr/>
-        </p:nvSpPr>
-        <p:spPr>
-          <a:xfrm>
-            <a:off x="6217920" y="4329684"/>
-            <a:ext cx="5715000" cy="246888"/>
-          </a:xfrm>
-          <a:prstGeom prst="rect">
-            <a:avLst/>
-          </a:prstGeom>
-          <a:noFill/>
-          <a:effectLst/>
-        </p:spPr>
-        <p:txBody>
-          <a:bodyPr wrap="square" lIns="27432" rIns="27432" tIns="18288" bIns="18288" anchor="ctr">
-            <a:spAutoFit/>
-          </a:bodyPr>
-          <a:lstStyle/>
-          <a:p>
-            <a:pPr algn="l">
-              <a:spcAft>
-                <a:spcPts val="0"/>
-              </a:spcAft>
-            </a:pPr>
-            <a:r>
-              <a:rPr sz="1150" b="0" i="0">
-                <a:solidFill>
-                  <a:srgbClr val="B4C7D2"/>
-                </a:solidFill>
-                <a:latin typeface="Arial"/>
-              </a:rPr>
-              <a:t>• b_i, b_j monopole strengths</a:t>
-            </a:r>
-          </a:p>
-        </p:txBody>
-      </p:sp>
-      <p:sp>
-        <p:nvSpPr>
-          <p:cNvPr id="17" name="C3-E11 text 15" descr="sci-ppt:o015"/>
-          <p:cNvSpPr txBox="1"/>
-          <p:nvPr/>
-        </p:nvSpPr>
-        <p:spPr>
-          <a:xfrm>
-            <a:off x="320040" y="4562856"/>
-            <a:ext cx="5715000" cy="246888"/>
-          </a:xfrm>
-          <a:prstGeom prst="rect">
-            <a:avLst/>
-          </a:prstGeom>
-          <a:noFill/>
-          <a:effectLst/>
-        </p:spPr>
-        <p:txBody>
-          <a:bodyPr wrap="square" lIns="27432" rIns="27432" tIns="18288" bIns="18288" anchor="ctr">
-            <a:spAutoFit/>
-          </a:bodyPr>
-          <a:lstStyle/>
-          <a:p>
-            <a:pPr algn="l">
-              <a:spcAft>
-                <a:spcPts val="0"/>
-              </a:spcAft>
-            </a:pPr>
-            <a:r>
-              <a:rPr sz="1150" b="0" i="0">
-                <a:solidFill>
-                  <a:srgbClr val="B4C7D2"/>
-                </a:solidFill>
-                <a:latin typeface="Arial"/>
-              </a:rPr>
-              <a:t>• φ_i, φ_j; ∇φ gradients</a:t>
-            </a:r>
-          </a:p>
-        </p:txBody>
-      </p:sp>
-      <p:sp>
-        <p:nvSpPr>
-          <p:cNvPr id="18" name="C3-E11 text 16" descr="sci-ppt:o016"/>
-          <p:cNvSpPr txBox="1"/>
-          <p:nvPr/>
-        </p:nvSpPr>
-        <p:spPr>
-          <a:xfrm>
-            <a:off x="6217920" y="4562856"/>
-            <a:ext cx="5715000" cy="246888"/>
-          </a:xfrm>
-          <a:prstGeom prst="rect">
-            <a:avLst/>
-          </a:prstGeom>
-          <a:noFill/>
-          <a:effectLst/>
-        </p:spPr>
-        <p:txBody>
-          <a:bodyPr wrap="square" lIns="27432" rIns="27432" tIns="18288" bIns="18288" anchor="ctr">
-            <a:spAutoFit/>
-          </a:bodyPr>
-          <a:lstStyle/>
-          <a:p>
-            <a:pPr algn="l">
-              <a:spcAft>
-                <a:spcPts val="0"/>
-              </a:spcAft>
-            </a:pPr>
-            <a:r>
-              <a:rPr sz="1150" b="0" i="0">
-                <a:solidFill>
-                  <a:srgbClr val="B4C7D2"/>
-                </a:solidFill>
-                <a:latin typeface="Arial"/>
-              </a:rPr>
-              <a:t>• Ω, Γ_j liquid domain/bubble surface; ∂ₙ</a:t>
-            </a:r>
-          </a:p>
-        </p:txBody>
-      </p:sp>
-      <p:sp>
-        <p:nvSpPr>
-          <p:cNvPr id="19" name="C3-E11 text 17" descr="sci-ppt:o017"/>
-          <p:cNvSpPr txBox="1"/>
-          <p:nvPr/>
-        </p:nvSpPr>
-        <p:spPr>
-          <a:xfrm>
-            <a:off x="320040" y="4796028"/>
-            <a:ext cx="5715000" cy="246888"/>
-          </a:xfrm>
-          <a:prstGeom prst="rect">
-            <a:avLst/>
-          </a:prstGeom>
-          <a:noFill/>
-          <a:effectLst/>
-        </p:spPr>
-        <p:txBody>
-          <a:bodyPr wrap="square" lIns="27432" rIns="27432" tIns="18288" bIns="18288" anchor="ctr">
-            <a:spAutoFit/>
-          </a:bodyPr>
-          <a:lstStyle/>
-          <a:p>
-            <a:pPr algn="l">
-              <a:spcAft>
-                <a:spcPts val="0"/>
-              </a:spcAft>
-            </a:pPr>
-            <a:r>
-              <a:rPr sz="1150" b="0" i="0">
-                <a:solidFill>
-                  <a:srgbClr val="B4C7D2"/>
-                </a:solidFill>
-                <a:latin typeface="Arial"/>
-              </a:rPr>
-              <a:t>• K_N = self + pair energy; ρ, S</a:t>
-            </a:r>
-          </a:p>
-        </p:txBody>
-      </p:sp>
-      <p:sp>
-        <p:nvSpPr>
-          <p:cNvPr id="20" name="C3-E11 text 18" descr="sci-ppt:o018"/>
-          <p:cNvSpPr txBox="1"/>
-          <p:nvPr/>
-        </p:nvSpPr>
-        <p:spPr>
-          <a:xfrm>
-            <a:off x="6217920" y="4796028"/>
-            <a:ext cx="5715000" cy="246888"/>
-          </a:xfrm>
-          <a:prstGeom prst="rect">
-            <a:avLst/>
-          </a:prstGeom>
-          <a:noFill/>
-          <a:effectLst/>
-        </p:spPr>
-        <p:txBody>
-          <a:bodyPr wrap="square" lIns="27432" rIns="27432" tIns="18288" bIns="18288" anchor="ctr">
-            <a:spAutoFit/>
-          </a:bodyPr>
-          <a:lstStyle/>
-          <a:p>
-            <a:pPr algn="l">
-              <a:spcAft>
-                <a:spcPts val="0"/>
-              </a:spcAft>
-            </a:pPr>
-            <a:r>
-              <a:rPr sz="1150" b="0" i="0">
-                <a:solidFill>
-                  <a:srgbClr val="B4C7D2"/>
-                </a:solidFill>
-                <a:latin typeface="Arial"/>
-              </a:rPr>
-              <a:t>• Δp_c pressure-work reservoir</a:t>
-            </a:r>
-          </a:p>
-        </p:txBody>
-      </p:sp>
-      <p:sp>
-        <p:nvSpPr>
-          <p:cNvPr id="21" name="C3-E11 text 19" descr="sci-ppt:o019"/>
-          <p:cNvSpPr txBox="1"/>
-          <p:nvPr/>
-        </p:nvSpPr>
-        <p:spPr>
-          <a:xfrm>
-            <a:off x="320040" y="5029200"/>
-            <a:ext cx="5715000" cy="246888"/>
-          </a:xfrm>
-          <a:prstGeom prst="rect">
-            <a:avLst/>
-          </a:prstGeom>
-          <a:noFill/>
-          <a:effectLst/>
-        </p:spPr>
-        <p:txBody>
-          <a:bodyPr wrap="square" lIns="27432" rIns="27432" tIns="18288" bIns="18288" anchor="ctr">
-            <a:spAutoFit/>
-          </a:bodyPr>
-          <a:lstStyle/>
-          <a:p>
-            <a:pPr algn="l">
-              <a:spcAft>
-                <a:spcPts val="0"/>
-              </a:spcAft>
-            </a:pPr>
-            <a:r>
-              <a:rPr sz="1150" b="0" i="0">
-                <a:solidFill>
-                  <a:srgbClr val="B4C7D2"/>
-                </a:solidFill>
-                <a:latin typeface="Arial"/>
-              </a:rPr>
-              <a:t>• E_B,tot fixed total work</a:t>
-            </a:r>
-          </a:p>
-        </p:txBody>
-      </p:sp>
-      <p:sp>
-        <p:nvSpPr>
-          <p:cNvPr id="22" name="C3-E11 text 20" descr="sci-ppt:o020"/>
-          <p:cNvSpPr txBox="1"/>
-          <p:nvPr/>
-        </p:nvSpPr>
-        <p:spPr>
-          <a:xfrm>
-            <a:off x="6217920" y="5029200"/>
-            <a:ext cx="5715000" cy="246888"/>
-          </a:xfrm>
-          <a:prstGeom prst="rect">
-            <a:avLst/>
-          </a:prstGeom>
-          <a:noFill/>
-          <a:effectLst/>
-        </p:spPr>
-        <p:txBody>
-          <a:bodyPr wrap="square" lIns="27432" rIns="27432" tIns="18288" bIns="18288" anchor="ctr">
-            <a:spAutoFit/>
-          </a:bodyPr>
-          <a:lstStyle/>
-          <a:p>
-            <a:pPr algn="l">
-              <a:spcAft>
-                <a:spcPts val="0"/>
-              </a:spcAft>
-            </a:pPr>
-            <a:r>
-              <a:rPr sz="1150" b="0" i="0">
-                <a:solidFill>
-                  <a:srgbClr val="B4C7D2"/>
-                </a:solidFill>
-                <a:latin typeface="Arial"/>
-              </a:rPr>
-              <a:t>• R_max,N = R_* N^−1/3</a:t>
-            </a:r>
-          </a:p>
-        </p:txBody>
-      </p:sp>
-      <p:sp>
-        <p:nvSpPr>
-          <p:cNvPr id="23" name="C3-E11 text 21" descr="sci-ppt:o021"/>
-          <p:cNvSpPr txBox="1"/>
-          <p:nvPr/>
-        </p:nvSpPr>
-        <p:spPr>
-          <a:xfrm>
-            <a:off x="320040" y="5262372"/>
-            <a:ext cx="5715000" cy="246888"/>
-          </a:xfrm>
-          <a:prstGeom prst="rect">
-            <a:avLst/>
-          </a:prstGeom>
-          <a:noFill/>
-          <a:effectLst/>
-        </p:spPr>
-        <p:txBody>
-          <a:bodyPr wrap="square" lIns="27432" rIns="27432" tIns="18288" bIns="18288" anchor="ctr">
-            <a:spAutoFit/>
-          </a:bodyPr>
-          <a:lstStyle/>
-          <a:p>
-            <a:pPr algn="l">
-              <a:spcAft>
-                <a:spcPts val="0"/>
-              </a:spcAft>
-            </a:pPr>
-            <a:r>
-              <a:rPr sz="1150" b="0" i="0">
-                <a:solidFill>
-                  <a:srgbClr val="B4C7D2"/>
-                </a:solidFill>
-                <a:latin typeface="Arial"/>
-              </a:rPr>
-              <a:t>• ∫, Σ, dV, dA, π; * reference label</a:t>
-            </a:r>
-          </a:p>
-        </p:txBody>
-      </p:sp>
-      <p:sp>
-        <p:nvSpPr>
-          <p:cNvPr id="24" name="C3-E11 text 22" descr="sci-ppt:o022"/>
-          <p:cNvSpPr txBox="1"/>
-          <p:nvPr/>
-        </p:nvSpPr>
-        <p:spPr>
-          <a:xfrm>
-            <a:off x="320040" y="5632704"/>
-            <a:ext cx="11430000" cy="292608"/>
-          </a:xfrm>
-          <a:prstGeom prst="rect">
-            <a:avLst/>
-          </a:prstGeom>
-          <a:noFill/>
-          <a:effectLst/>
-        </p:spPr>
-        <p:txBody>
-          <a:bodyPr wrap="square" lIns="27432" rIns="27432" tIns="18288" bIns="18288" anchor="ctr">
+          <a:bodyPr wrap="none" lIns="18288" rIns="18288" tIns="18288" bIns="18288" anchor="t">
             <a:spAutoFit/>
           </a:bodyPr>
           <a:lstStyle/>
@@ -3937,21 +5467,21 @@
                 </a:solidFill>
                 <a:latin typeface="Arial"/>
               </a:rPr>
-              <a:t>Interaction raises effective inertia, not initial energy</a:t>
-            </a:r>
-          </a:p>
-        </p:txBody>
-      </p:sp>
-      <p:sp>
-        <p:nvSpPr>
-          <p:cNvPr id="25" name="C3-E11 text 23" descr="sci-ppt:o023"/>
+              <a:t>work per bubble = E_B,tot / N</a:t>
+            </a:r>
+          </a:p>
+        </p:txBody>
+      </p:sp>
+      <p:sp>
+        <p:nvSpPr>
+          <p:cNvPr id="75" name="C3-E11 text 73" descr="sci-ppt:o073"/>
           <p:cNvSpPr txBox="1"/>
           <p:nvPr/>
         </p:nvSpPr>
         <p:spPr>
           <a:xfrm>
-            <a:off x="320040" y="5907024"/>
-            <a:ext cx="11430000" cy="292608"/>
+            <a:off x="914400" y="5486400"/>
+            <a:ext cx="10972800" cy="239395"/>
           </a:xfrm>
           <a:prstGeom prst="rect">
             <a:avLst/>
@@ -3960,7 +5490,7 @@
           <a:effectLst/>
         </p:spPr>
         <p:txBody>
-          <a:bodyPr wrap="square" lIns="27432" rIns="27432" tIns="18288" bIns="18288" anchor="ctr">
+          <a:bodyPr wrap="none" lIns="18288" rIns="18288" tIns="18288" bIns="18288" anchor="t">
             <a:spAutoFit/>
           </a:bodyPr>
           <a:lstStyle/>
@@ -3971,27 +5501,27 @@
               </a:spcAft>
             </a:pPr>
             <a:r>
-              <a:rPr sz="1150" b="0" i="0">
+              <a:rPr sz="1250" b="1" i="0">
                 <a:solidFill>
-                  <a:srgbClr val="8EDBD4"/>
+                  <a:srgbClr val="E7F0F3"/>
                 </a:solidFill>
                 <a:latin typeface="Arial"/>
               </a:rPr>
-              <a:t>Fixed per-bubble radius increases total available work</a:t>
-            </a:r>
-          </a:p>
-        </p:txBody>
-      </p:sp>
-      <p:sp>
-        <p:nvSpPr>
-          <p:cNvPr id="26" name="C3-E11 text 24" descr="sci-ppt:o024"/>
+              <a:t>K_N ≃ 2πρ N R³(1 + SR) Ṙ² = (4πN/3) Δp_c (Rₘₐₓ³ − R³)   in the leading symmetric model (energy balance holds).</a:t>
+            </a:r>
+          </a:p>
+        </p:txBody>
+      </p:sp>
+      <p:sp>
+        <p:nvSpPr>
+          <p:cNvPr id="76" name="C3-E11 text 74" descr="sci-ppt:o074"/>
           <p:cNvSpPr txBox="1"/>
           <p:nvPr/>
         </p:nvSpPr>
         <p:spPr>
           <a:xfrm>
-            <a:off x="320040" y="6473952"/>
-            <a:ext cx="11430000" cy="256032"/>
+            <a:off x="914400" y="5943600"/>
+            <a:ext cx="10972800" cy="239395"/>
           </a:xfrm>
           <a:prstGeom prst="rect">
             <a:avLst/>
@@ -4000,7 +5530,47 @@
           <a:effectLst/>
         </p:spPr>
         <p:txBody>
-          <a:bodyPr wrap="square" lIns="27432" rIns="27432" tIns="18288" bIns="18288" anchor="ctr">
+          <a:bodyPr wrap="none" lIns="18288" rIns="18288" tIns="18288" bIns="18288" anchor="t">
+            <a:spAutoFit/>
+          </a:bodyPr>
+          <a:lstStyle/>
+          <a:p>
+            <a:pPr algn="l">
+              <a:spcAft>
+                <a:spcPts val="0"/>
+              </a:spcAft>
+            </a:pPr>
+            <a:r>
+              <a:rPr sz="1250" b="0" i="0">
+                <a:solidFill>
+                  <a:srgbClr val="F2B880"/>
+                </a:solidFill>
+                <a:latin typeface="Arial"/>
+              </a:rPr>
+              <a:t>Splitting a fixed pressure-work budget among N bubbles shrinks each one: Rₘₐₓ,N = R_* N^(−1/3).</a:t>
+            </a:r>
+          </a:p>
+        </p:txBody>
+      </p:sp>
+      <p:sp>
+        <p:nvSpPr>
+          <p:cNvPr id="77" name="C3-E11 text 75" descr="sci-ppt:o075"/>
+          <p:cNvSpPr txBox="1"/>
+          <p:nvPr/>
+        </p:nvSpPr>
+        <p:spPr>
+          <a:xfrm>
+            <a:off x="320040" y="6510528"/>
+            <a:ext cx="11521440" cy="200660"/>
+          </a:xfrm>
+          <a:prstGeom prst="rect">
+            <a:avLst/>
+          </a:prstGeom>
+          <a:noFill/>
+          <a:effectLst/>
+        </p:spPr>
+        <p:txBody>
+          <a:bodyPr wrap="none" lIns="18288" rIns="18288" tIns="18288" bIns="18288" anchor="t">
             <a:spAutoFit/>
           </a:bodyPr>
           <a:lstStyle/>
@@ -4017,7 +5587,7 @@
                 </a:solidFill>
                 <a:latin typeface="Arial"/>
               </a:rPr>
-              <a:t>Model schematic; geometry is not to scale.</a:t>
+              <a:t>Energy check and fixed-total-work comparison of Eq. C3-E11.</a:t>
             </a:r>
           </a:p>
         </p:txBody>
